--- a/final_project_boolean.pptx
+++ b/final_project_boolean.pptx
@@ -843,7 +843,7 @@
           <a:lstStyle/>
           <a:p>
             <a:pPr rtl="0"/>
-            <a:endParaRPr lang="it-IT"/>
+            <a:endParaRPr lang="it-IT" dirty="0"/>
           </a:p>
         </p:txBody>
       </p:sp>
@@ -31154,7 +31154,7 @@
             </a:br>
             <a:r>
               <a:rPr lang="en-US" sz="6000" dirty="0"/>
-              <a:t>Analysis (ISTAT)</a:t>
+              <a:t>Analysis</a:t>
             </a:r>
             <a:endParaRPr lang="it-IT" sz="6000" dirty="0"/>
           </a:p>
@@ -31230,8 +31230,8 @@
           </a:p>
         </p:txBody>
       </p:sp>
-      <mc:AlternateContent xmlns:mc="http://schemas.openxmlformats.org/markup-compatibility/2006" xmlns:a14="http://schemas.microsoft.com/office/drawing/2010/main">
-        <mc:Choice Requires="a14">
+      <mc:AlternateContent xmlns:mc="http://schemas.openxmlformats.org/markup-compatibility/2006">
+        <mc:Choice xmlns:a14="http://schemas.microsoft.com/office/drawing/2010/main" Requires="a14">
           <p:sp>
             <p:nvSpPr>
               <p:cNvPr id="13" name="Segnaposto contenuto 12">
@@ -31251,12 +31251,12 @@
             <p:spPr>
               <a:xfrm>
                 <a:off x="548640" y="1412775"/>
-                <a:ext cx="10947960" cy="4838959"/>
+                <a:ext cx="10947960" cy="5445225"/>
               </a:xfrm>
             </p:spPr>
             <p:txBody>
               <a:bodyPr rtlCol="0">
-                <a:normAutofit fontScale="92500" lnSpcReduction="20000"/>
+                <a:normAutofit fontScale="92500" lnSpcReduction="10000"/>
               </a:bodyPr>
               <a:lstStyle/>
               <a:p>
@@ -31282,11 +31282,11 @@
                 </a:r>
                 <a:r>
                   <a:rPr lang="it-IT" b="1" dirty="0"/>
-                  <a:t>tasso di incidenti per 1000 abitanti residenti</a:t>
+                  <a:t>tasso di incidenti per abitanti residenti</a:t>
                 </a:r>
                 <a:r>
                   <a:rPr lang="it-IT" dirty="0"/>
-                  <a:t> più alto, quelle con il </a:t>
+                  <a:t> e quelle con il </a:t>
                 </a:r>
                 <a:r>
                   <a:rPr lang="it-IT" b="1" dirty="0"/>
@@ -31323,7 +31323,7 @@
                 </a14:m>
                 <a:r>
                   <a:rPr lang="it-IT" dirty="0"/>
-                  <a:t> più alto e le città con il più alto </a:t>
+                  <a:t> più alto, e le città con il più alto </a:t>
                 </a:r>
                 <a:r>
                   <a:rPr lang="it-IT" b="1" dirty="0"/>
@@ -31518,7 +31518,7 @@
             </p:txBody>
           </p:sp>
         </mc:Choice>
-        <mc:Fallback xmlns="">
+        <mc:Fallback>
           <p:sp>
             <p:nvSpPr>
               <p:cNvPr id="13" name="Segnaposto contenuto 12">
@@ -31538,12 +31538,12 @@
             <p:spPr>
               <a:xfrm>
                 <a:off x="548640" y="1412775"/>
-                <a:ext cx="10947960" cy="4838959"/>
+                <a:ext cx="10947960" cy="5445225"/>
               </a:xfrm>
               <a:blipFill>
                 <a:blip r:embed="rId3"/>
                 <a:stretch>
-                  <a:fillRect l="-390" t="-2267" r="-1058"/>
+                  <a:fillRect l="-390" t="-1568" r="-1058"/>
                 </a:stretch>
               </a:blipFill>
             </p:spPr>
@@ -31562,304 +31562,6 @@
           </p:sp>
         </mc:Fallback>
       </mc:AlternateContent>
-      <p:sp>
-        <p:nvSpPr>
-          <p:cNvPr id="3" name="Segnaposto numero diapositiva 2">
-            <a:extLst>
-              <a:ext uri="{FF2B5EF4-FFF2-40B4-BE49-F238E27FC236}">
-                <a16:creationId xmlns:a16="http://schemas.microsoft.com/office/drawing/2014/main" id="{5F44A039-11AB-474F-8746-9A34D1C39C3F}"/>
-              </a:ext>
-            </a:extLst>
-          </p:cNvPr>
-          <p:cNvSpPr>
-            <a:spLocks noGrp="1"/>
-          </p:cNvSpPr>
-          <p:nvPr>
-            <p:ph type="sldNum" sz="quarter" idx="4"/>
-          </p:nvPr>
-        </p:nvSpPr>
-        <p:spPr/>
-        <p:txBody>
-          <a:bodyPr rtlCol="0"/>
-          <a:lstStyle/>
-          <a:p>
-            <a:pPr rtl="0"/>
-            <a:fld id="{4FAB73BC-B049-4115-A692-8D63A059BFB8}" type="slidenum">
-              <a:rPr lang="it-IT" smtClean="0"/>
-              <a:pPr/>
-              <a:t>2</a:t>
-            </a:fld>
-            <a:endParaRPr lang="it-IT"/>
-          </a:p>
-        </p:txBody>
-      </p:sp>
-      <p:sp>
-        <p:nvSpPr>
-          <p:cNvPr id="18" name="Segnaposto testo 119">
-            <a:extLst>
-              <a:ext uri="{FF2B5EF4-FFF2-40B4-BE49-F238E27FC236}">
-                <a16:creationId xmlns:a16="http://schemas.microsoft.com/office/drawing/2014/main" id="{6E5B80C5-6B42-4867-88CC-660291DD3F8D}"/>
-              </a:ext>
-              <a:ext uri="{C183D7F6-B498-43B3-948B-1728B52AA6E4}">
-                <adec:decorative xmlns:adec="http://schemas.microsoft.com/office/drawing/2017/decorative" val="1"/>
-              </a:ext>
-            </a:extLst>
-          </p:cNvPr>
-          <p:cNvSpPr txBox="1">
-            <a:spLocks/>
-          </p:cNvSpPr>
-          <p:nvPr/>
-        </p:nvSpPr>
-        <p:spPr>
-          <a:xfrm>
-            <a:off x="693060" y="6641305"/>
-            <a:ext cx="173736" cy="152400"/>
-          </a:xfrm>
-          <a:prstGeom prst="rect">
-            <a:avLst/>
-          </a:prstGeom>
-          <a:solidFill>
-            <a:schemeClr val="accent2"/>
-          </a:solidFill>
-          <a:effectLst>
-            <a:outerShdw blurRad="50800" dist="38100" dir="2700000" algn="tl" rotWithShape="0">
-              <a:prstClr val="black">
-                <a:alpha val="40000"/>
-              </a:prstClr>
-            </a:outerShdw>
-          </a:effectLst>
-        </p:spPr>
-        <p:txBody>
-          <a:bodyPr vert="horz" lIns="45720" tIns="45720" rIns="45720" bIns="45720" rtlCol="0">
-            <a:normAutofit fontScale="25000" lnSpcReduction="20000"/>
-          </a:bodyPr>
-          <a:lstStyle>
-            <a:lvl1pPr marL="0" indent="0" algn="l" defTabSz="914400" rtl="0" eaLnBrk="1" latinLnBrk="0" hangingPunct="1">
-              <a:lnSpc>
-                <a:spcPct val="90000"/>
-              </a:lnSpc>
-              <a:spcBef>
-                <a:spcPts val="1200"/>
-              </a:spcBef>
-              <a:spcAft>
-                <a:spcPts val="200"/>
-              </a:spcAft>
-              <a:buClr>
-                <a:schemeClr val="accent1"/>
-              </a:buClr>
-              <a:buSzPct val="100000"/>
-              <a:buFont typeface="Arial" panose="020B0604020202020204" pitchFamily="34" charset="0"/>
-              <a:buNone/>
-              <a:defRPr sz="2000" kern="1200">
-                <a:solidFill>
-                  <a:schemeClr val="tx1">
-                    <a:alpha val="0"/>
-                  </a:schemeClr>
-                </a:solidFill>
-                <a:latin typeface="+mn-lt"/>
-                <a:ea typeface="+mn-ea"/>
-                <a:cs typeface="+mn-cs"/>
-              </a:defRPr>
-            </a:lvl1pPr>
-            <a:lvl2pPr marL="457200" indent="-228600" algn="l" defTabSz="914400" rtl="0" eaLnBrk="1" latinLnBrk="0" hangingPunct="1">
-              <a:lnSpc>
-                <a:spcPct val="90000"/>
-              </a:lnSpc>
-              <a:spcBef>
-                <a:spcPts val="200"/>
-              </a:spcBef>
-              <a:spcAft>
-                <a:spcPts val="400"/>
-              </a:spcAft>
-              <a:buClr>
-                <a:schemeClr val="accent1"/>
-              </a:buClr>
-              <a:buFont typeface="Arial" panose="020B0604020202020204" pitchFamily="34" charset="0"/>
-              <a:buChar char="•"/>
-              <a:defRPr sz="1800" kern="1200">
-                <a:solidFill>
-                  <a:schemeClr val="tx1"/>
-                </a:solidFill>
-                <a:latin typeface="+mn-lt"/>
-                <a:ea typeface="+mn-ea"/>
-                <a:cs typeface="+mn-cs"/>
-              </a:defRPr>
-            </a:lvl2pPr>
-            <a:lvl3pPr marL="685800" indent="-228600" algn="l" defTabSz="914400" rtl="0" eaLnBrk="1" latinLnBrk="0" hangingPunct="1">
-              <a:lnSpc>
-                <a:spcPct val="90000"/>
-              </a:lnSpc>
-              <a:spcBef>
-                <a:spcPts val="200"/>
-              </a:spcBef>
-              <a:spcAft>
-                <a:spcPts val="400"/>
-              </a:spcAft>
-              <a:buClr>
-                <a:schemeClr val="accent1"/>
-              </a:buClr>
-              <a:buFont typeface="Arial" panose="020B0604020202020204" pitchFamily="34" charset="0"/>
-              <a:buChar char="•"/>
-              <a:defRPr sz="1600" kern="1200">
-                <a:solidFill>
-                  <a:schemeClr val="tx1"/>
-                </a:solidFill>
-                <a:latin typeface="+mn-lt"/>
-                <a:ea typeface="+mn-ea"/>
-                <a:cs typeface="+mn-cs"/>
-              </a:defRPr>
-            </a:lvl3pPr>
-            <a:lvl4pPr marL="914400" indent="-228600" algn="l" defTabSz="914400" rtl="0" eaLnBrk="1" latinLnBrk="0" hangingPunct="1">
-              <a:lnSpc>
-                <a:spcPct val="90000"/>
-              </a:lnSpc>
-              <a:spcBef>
-                <a:spcPts val="200"/>
-              </a:spcBef>
-              <a:spcAft>
-                <a:spcPts val="400"/>
-              </a:spcAft>
-              <a:buClr>
-                <a:schemeClr val="accent1"/>
-              </a:buClr>
-              <a:buFont typeface="Arial" panose="020B0604020202020204" pitchFamily="34" charset="0"/>
-              <a:buChar char="•"/>
-              <a:defRPr sz="1400" kern="1200">
-                <a:solidFill>
-                  <a:schemeClr val="tx1"/>
-                </a:solidFill>
-                <a:latin typeface="+mn-lt"/>
-                <a:ea typeface="+mn-ea"/>
-                <a:cs typeface="+mn-cs"/>
-              </a:defRPr>
-            </a:lvl4pPr>
-            <a:lvl5pPr marL="1143000" indent="-228600" algn="l" defTabSz="914400" rtl="0" eaLnBrk="1" latinLnBrk="0" hangingPunct="1">
-              <a:lnSpc>
-                <a:spcPct val="90000"/>
-              </a:lnSpc>
-              <a:spcBef>
-                <a:spcPts val="200"/>
-              </a:spcBef>
-              <a:spcAft>
-                <a:spcPts val="400"/>
-              </a:spcAft>
-              <a:buClr>
-                <a:schemeClr val="accent1"/>
-              </a:buClr>
-              <a:buFont typeface="Arial" panose="020B0604020202020204" pitchFamily="34" charset="0"/>
-              <a:buChar char="•"/>
-              <a:defRPr sz="1400" kern="1200">
-                <a:solidFill>
-                  <a:schemeClr val="tx1"/>
-                </a:solidFill>
-                <a:latin typeface="+mn-lt"/>
-                <a:ea typeface="+mn-ea"/>
-                <a:cs typeface="+mn-cs"/>
-              </a:defRPr>
-            </a:lvl5pPr>
-            <a:lvl6pPr marL="914400" indent="-137160" algn="l" defTabSz="914400" rtl="0" eaLnBrk="1" latinLnBrk="0" hangingPunct="1">
-              <a:lnSpc>
-                <a:spcPct val="90000"/>
-              </a:lnSpc>
-              <a:spcBef>
-                <a:spcPts val="200"/>
-              </a:spcBef>
-              <a:spcAft>
-                <a:spcPts val="400"/>
-              </a:spcAft>
-              <a:buClr>
-                <a:schemeClr val="accent1"/>
-              </a:buClr>
-              <a:buFont typeface="Wingdings 3" pitchFamily="18" charset="2"/>
-              <a:buChar char=""/>
-              <a:defRPr sz="1400" kern="1200">
-                <a:solidFill>
-                  <a:schemeClr val="tx1"/>
-                </a:solidFill>
-                <a:latin typeface="+mn-lt"/>
-                <a:ea typeface="+mn-ea"/>
-                <a:cs typeface="+mn-cs"/>
-              </a:defRPr>
-            </a:lvl6pPr>
-            <a:lvl7pPr marL="1060704" indent="-137160" algn="l" defTabSz="914400" rtl="0" eaLnBrk="1" latinLnBrk="0" hangingPunct="1">
-              <a:lnSpc>
-                <a:spcPct val="90000"/>
-              </a:lnSpc>
-              <a:spcBef>
-                <a:spcPts val="200"/>
-              </a:spcBef>
-              <a:spcAft>
-                <a:spcPts val="400"/>
-              </a:spcAft>
-              <a:buClr>
-                <a:schemeClr val="accent1"/>
-              </a:buClr>
-              <a:buFont typeface="Wingdings 3" pitchFamily="18" charset="2"/>
-              <a:buChar char=""/>
-              <a:defRPr sz="1400" kern="1200">
-                <a:solidFill>
-                  <a:schemeClr val="tx1"/>
-                </a:solidFill>
-                <a:latin typeface="+mn-lt"/>
-                <a:ea typeface="+mn-ea"/>
-                <a:cs typeface="+mn-cs"/>
-              </a:defRPr>
-            </a:lvl7pPr>
-            <a:lvl8pPr marL="1216152" indent="-137160" algn="l" defTabSz="914400" rtl="0" eaLnBrk="1" latinLnBrk="0" hangingPunct="1">
-              <a:lnSpc>
-                <a:spcPct val="90000"/>
-              </a:lnSpc>
-              <a:spcBef>
-                <a:spcPts val="200"/>
-              </a:spcBef>
-              <a:spcAft>
-                <a:spcPts val="400"/>
-              </a:spcAft>
-              <a:buClr>
-                <a:schemeClr val="accent1"/>
-              </a:buClr>
-              <a:buFont typeface="Wingdings 3" pitchFamily="18" charset="2"/>
-              <a:buChar char=""/>
-              <a:defRPr sz="1400" kern="1200">
-                <a:solidFill>
-                  <a:schemeClr val="tx1"/>
-                </a:solidFill>
-                <a:latin typeface="+mn-lt"/>
-                <a:ea typeface="+mn-ea"/>
-                <a:cs typeface="+mn-cs"/>
-              </a:defRPr>
-            </a:lvl8pPr>
-            <a:lvl9pPr marL="1362456" indent="-137160" algn="l" defTabSz="914400" rtl="0" eaLnBrk="1" latinLnBrk="0" hangingPunct="1">
-              <a:lnSpc>
-                <a:spcPct val="90000"/>
-              </a:lnSpc>
-              <a:spcBef>
-                <a:spcPts val="200"/>
-              </a:spcBef>
-              <a:spcAft>
-                <a:spcPts val="400"/>
-              </a:spcAft>
-              <a:buClr>
-                <a:schemeClr val="accent1"/>
-              </a:buClr>
-              <a:buFont typeface="Wingdings 3" pitchFamily="18" charset="2"/>
-              <a:buChar char=""/>
-              <a:defRPr sz="1400" kern="1200">
-                <a:solidFill>
-                  <a:schemeClr val="tx1"/>
-                </a:solidFill>
-                <a:latin typeface="+mn-lt"/>
-                <a:ea typeface="+mn-ea"/>
-                <a:cs typeface="+mn-cs"/>
-              </a:defRPr>
-            </a:lvl9pPr>
-          </a:lstStyle>
-          <a:p>
-            <a:pPr rtl="0"/>
-            <a:endParaRPr lang="it-IT"/>
-          </a:p>
-        </p:txBody>
-      </p:sp>
       <p:pic>
         <p:nvPicPr>
           <p:cNvPr id="10" name="Segnaposto immagine 5">
@@ -31966,7 +31668,23 @@
                   <a:srgbClr val="FF0000"/>
                 </a:solidFill>
               </a:rPr>
-              <a:t>STRUTTURA, VARIABILI E UNIONI DEI DATASET</a:t>
+              <a:t>STRUTTURA, VARIABILI E </a:t>
+            </a:r>
+            <a:r>
+              <a:rPr lang="it-IT" dirty="0" err="1">
+                <a:solidFill>
+                  <a:srgbClr val="FF0000"/>
+                </a:solidFill>
+              </a:rPr>
+              <a:t>UNIONe</a:t>
+            </a:r>
+            <a:r>
+              <a:rPr lang="it-IT" dirty="0">
+                <a:solidFill>
+                  <a:srgbClr val="FF0000"/>
+                </a:solidFill>
+              </a:rPr>
+              <a:t> DEI DATASET</a:t>
             </a:r>
           </a:p>
         </p:txBody>
@@ -31990,12 +31708,12 @@
         <p:spPr>
           <a:xfrm>
             <a:off x="548640" y="1412776"/>
-            <a:ext cx="11235992" cy="4927064"/>
+            <a:ext cx="11235992" cy="5445224"/>
           </a:xfrm>
         </p:spPr>
         <p:txBody>
           <a:bodyPr rtlCol="0">
-            <a:normAutofit fontScale="92500" lnSpcReduction="20000"/>
+            <a:normAutofit fontScale="92500" lnSpcReduction="10000"/>
           </a:bodyPr>
           <a:lstStyle/>
           <a:p>
@@ -32029,13 +31747,13 @@
             <a:pPr lvl="1"/>
             <a:r>
               <a:rPr lang="it-IT" dirty="0"/>
-              <a:t>Dataflow: IT1:41_983(1.0) </a:t>
+              <a:t>Dataflow: «IT1:41_983(1.0)» </a:t>
             </a:r>
             <a:r>
               <a:rPr lang="it-IT" dirty="0">
                 <a:sym typeface="Wingdings" panose="05000000000000000000" pitchFamily="2" charset="2"/>
               </a:rPr>
-              <a:t> IT1: ISTAT – </a:t>
+              <a:t> IT1: ISTAT ; </a:t>
             </a:r>
             <a:r>
               <a:rPr lang="it-IT" b="1" dirty="0">
@@ -32059,7 +31777,7 @@
               <a:rPr lang="it-IT" dirty="0">
                 <a:sym typeface="Wingdings" panose="05000000000000000000" pitchFamily="2" charset="2"/>
               </a:rPr>
-              <a:t>» - 1.0: versione</a:t>
+              <a:t>» ; 1.0: versione</a:t>
             </a:r>
           </a:p>
           <a:p>
@@ -32232,7 +31950,7 @@
               <a:rPr lang="it-IT" dirty="0">
                 <a:sym typeface="Wingdings" panose="05000000000000000000" pitchFamily="2" charset="2"/>
               </a:rPr>
-              <a:t>»</a:t>
+              <a:t>» (ISTAT, 2026)</a:t>
             </a:r>
           </a:p>
           <a:p>
@@ -32279,8 +31997,15 @@
               <a:rPr lang="it-IT" dirty="0">
                 <a:sym typeface="Wingdings" panose="05000000000000000000" pitchFamily="2" charset="2"/>
               </a:rPr>
-              <a:t> (a motore, senza motore, animale o a braccia), che circolano sulle strade guidate dall’uomo»</a:t>
-            </a:r>
+              <a:t> (a motore, senza motore, animale o a braccia), che circolano sulle strade guidate dall’uomo» </a:t>
+            </a:r>
+            <a:r>
+              <a:rPr lang="it-IT" dirty="0"/>
+              <a:t>(art. 46, D.Lgs. 30 aprile 1992, n. 285 - Codice della strada)</a:t>
+            </a:r>
+            <a:endParaRPr lang="it-IT" dirty="0">
+              <a:sym typeface="Wingdings" panose="05000000000000000000" pitchFamily="2" charset="2"/>
+            </a:endParaRPr>
           </a:p>
           <a:p>
             <a:pPr lvl="2"/>
@@ -32381,7 +32106,7 @@
               <a:rPr lang="it-IT" dirty="0">
                 <a:sym typeface="Wingdings" panose="05000000000000000000" pitchFamily="2" charset="2"/>
               </a:rPr>
-              <a:t> in riguardo ad una situazione di ROADACC (9: totale di incidenti stradali con lesioni alle persone) oppure di KILLINJ (F/M)</a:t>
+              <a:t> in riguardo ad una situazione di ROADACC (9: totale di incidenti stradali con lesioni alle persone) oppure di KILLINJ (totale F/totale M)</a:t>
             </a:r>
           </a:p>
           <a:p>
@@ -32512,304 +32237,6 @@
               <a:rPr lang="it-IT" b="1" dirty="0"/>
               <a:t>Veicoli - Pubblico registro automobilistico – comuni</a:t>
             </a:r>
-          </a:p>
-        </p:txBody>
-      </p:sp>
-      <p:sp>
-        <p:nvSpPr>
-          <p:cNvPr id="3" name="Segnaposto numero diapositiva 2">
-            <a:extLst>
-              <a:ext uri="{FF2B5EF4-FFF2-40B4-BE49-F238E27FC236}">
-                <a16:creationId xmlns:a16="http://schemas.microsoft.com/office/drawing/2014/main" id="{92ACDB87-879C-71D8-FF94-EC7AA4D66263}"/>
-              </a:ext>
-            </a:extLst>
-          </p:cNvPr>
-          <p:cNvSpPr>
-            <a:spLocks noGrp="1"/>
-          </p:cNvSpPr>
-          <p:nvPr>
-            <p:ph type="sldNum" sz="quarter" idx="4"/>
-          </p:nvPr>
-        </p:nvSpPr>
-        <p:spPr/>
-        <p:txBody>
-          <a:bodyPr rtlCol="0"/>
-          <a:lstStyle/>
-          <a:p>
-            <a:pPr rtl="0"/>
-            <a:fld id="{4FAB73BC-B049-4115-A692-8D63A059BFB8}" type="slidenum">
-              <a:rPr lang="it-IT" smtClean="0"/>
-              <a:pPr rtl="0"/>
-              <a:t>3</a:t>
-            </a:fld>
-            <a:endParaRPr lang="it-IT"/>
-          </a:p>
-        </p:txBody>
-      </p:sp>
-      <p:sp>
-        <p:nvSpPr>
-          <p:cNvPr id="18" name="Segnaposto testo 119">
-            <a:extLst>
-              <a:ext uri="{FF2B5EF4-FFF2-40B4-BE49-F238E27FC236}">
-                <a16:creationId xmlns:a16="http://schemas.microsoft.com/office/drawing/2014/main" id="{CFE4FA16-185A-92B9-5E08-AE25888C7EFE}"/>
-              </a:ext>
-              <a:ext uri="{C183D7F6-B498-43B3-948B-1728B52AA6E4}">
-                <adec:decorative xmlns:adec="http://schemas.microsoft.com/office/drawing/2017/decorative" val="1"/>
-              </a:ext>
-            </a:extLst>
-          </p:cNvPr>
-          <p:cNvSpPr txBox="1">
-            <a:spLocks/>
-          </p:cNvSpPr>
-          <p:nvPr/>
-        </p:nvSpPr>
-        <p:spPr>
-          <a:xfrm>
-            <a:off x="693060" y="6641305"/>
-            <a:ext cx="173736" cy="152400"/>
-          </a:xfrm>
-          <a:prstGeom prst="rect">
-            <a:avLst/>
-          </a:prstGeom>
-          <a:solidFill>
-            <a:schemeClr val="accent2"/>
-          </a:solidFill>
-          <a:effectLst>
-            <a:outerShdw blurRad="50800" dist="38100" dir="2700000" algn="tl" rotWithShape="0">
-              <a:prstClr val="black">
-                <a:alpha val="40000"/>
-              </a:prstClr>
-            </a:outerShdw>
-          </a:effectLst>
-        </p:spPr>
-        <p:txBody>
-          <a:bodyPr vert="horz" lIns="45720" tIns="45720" rIns="45720" bIns="45720" rtlCol="0">
-            <a:normAutofit fontScale="25000" lnSpcReduction="20000"/>
-          </a:bodyPr>
-          <a:lstStyle>
-            <a:lvl1pPr marL="0" indent="0" algn="l" defTabSz="914400" rtl="0" eaLnBrk="1" latinLnBrk="0" hangingPunct="1">
-              <a:lnSpc>
-                <a:spcPct val="90000"/>
-              </a:lnSpc>
-              <a:spcBef>
-                <a:spcPts val="1200"/>
-              </a:spcBef>
-              <a:spcAft>
-                <a:spcPts val="200"/>
-              </a:spcAft>
-              <a:buClr>
-                <a:schemeClr val="accent1"/>
-              </a:buClr>
-              <a:buSzPct val="100000"/>
-              <a:buFont typeface="Arial" panose="020B0604020202020204" pitchFamily="34" charset="0"/>
-              <a:buNone/>
-              <a:defRPr sz="2000" kern="1200">
-                <a:solidFill>
-                  <a:schemeClr val="tx1">
-                    <a:alpha val="0"/>
-                  </a:schemeClr>
-                </a:solidFill>
-                <a:latin typeface="+mn-lt"/>
-                <a:ea typeface="+mn-ea"/>
-                <a:cs typeface="+mn-cs"/>
-              </a:defRPr>
-            </a:lvl1pPr>
-            <a:lvl2pPr marL="457200" indent="-228600" algn="l" defTabSz="914400" rtl="0" eaLnBrk="1" latinLnBrk="0" hangingPunct="1">
-              <a:lnSpc>
-                <a:spcPct val="90000"/>
-              </a:lnSpc>
-              <a:spcBef>
-                <a:spcPts val="200"/>
-              </a:spcBef>
-              <a:spcAft>
-                <a:spcPts val="400"/>
-              </a:spcAft>
-              <a:buClr>
-                <a:schemeClr val="accent1"/>
-              </a:buClr>
-              <a:buFont typeface="Arial" panose="020B0604020202020204" pitchFamily="34" charset="0"/>
-              <a:buChar char="•"/>
-              <a:defRPr sz="1800" kern="1200">
-                <a:solidFill>
-                  <a:schemeClr val="tx1"/>
-                </a:solidFill>
-                <a:latin typeface="+mn-lt"/>
-                <a:ea typeface="+mn-ea"/>
-                <a:cs typeface="+mn-cs"/>
-              </a:defRPr>
-            </a:lvl2pPr>
-            <a:lvl3pPr marL="685800" indent="-228600" algn="l" defTabSz="914400" rtl="0" eaLnBrk="1" latinLnBrk="0" hangingPunct="1">
-              <a:lnSpc>
-                <a:spcPct val="90000"/>
-              </a:lnSpc>
-              <a:spcBef>
-                <a:spcPts val="200"/>
-              </a:spcBef>
-              <a:spcAft>
-                <a:spcPts val="400"/>
-              </a:spcAft>
-              <a:buClr>
-                <a:schemeClr val="accent1"/>
-              </a:buClr>
-              <a:buFont typeface="Arial" panose="020B0604020202020204" pitchFamily="34" charset="0"/>
-              <a:buChar char="•"/>
-              <a:defRPr sz="1600" kern="1200">
-                <a:solidFill>
-                  <a:schemeClr val="tx1"/>
-                </a:solidFill>
-                <a:latin typeface="+mn-lt"/>
-                <a:ea typeface="+mn-ea"/>
-                <a:cs typeface="+mn-cs"/>
-              </a:defRPr>
-            </a:lvl3pPr>
-            <a:lvl4pPr marL="914400" indent="-228600" algn="l" defTabSz="914400" rtl="0" eaLnBrk="1" latinLnBrk="0" hangingPunct="1">
-              <a:lnSpc>
-                <a:spcPct val="90000"/>
-              </a:lnSpc>
-              <a:spcBef>
-                <a:spcPts val="200"/>
-              </a:spcBef>
-              <a:spcAft>
-                <a:spcPts val="400"/>
-              </a:spcAft>
-              <a:buClr>
-                <a:schemeClr val="accent1"/>
-              </a:buClr>
-              <a:buFont typeface="Arial" panose="020B0604020202020204" pitchFamily="34" charset="0"/>
-              <a:buChar char="•"/>
-              <a:defRPr sz="1400" kern="1200">
-                <a:solidFill>
-                  <a:schemeClr val="tx1"/>
-                </a:solidFill>
-                <a:latin typeface="+mn-lt"/>
-                <a:ea typeface="+mn-ea"/>
-                <a:cs typeface="+mn-cs"/>
-              </a:defRPr>
-            </a:lvl4pPr>
-            <a:lvl5pPr marL="1143000" indent="-228600" algn="l" defTabSz="914400" rtl="0" eaLnBrk="1" latinLnBrk="0" hangingPunct="1">
-              <a:lnSpc>
-                <a:spcPct val="90000"/>
-              </a:lnSpc>
-              <a:spcBef>
-                <a:spcPts val="200"/>
-              </a:spcBef>
-              <a:spcAft>
-                <a:spcPts val="400"/>
-              </a:spcAft>
-              <a:buClr>
-                <a:schemeClr val="accent1"/>
-              </a:buClr>
-              <a:buFont typeface="Arial" panose="020B0604020202020204" pitchFamily="34" charset="0"/>
-              <a:buChar char="•"/>
-              <a:defRPr sz="1400" kern="1200">
-                <a:solidFill>
-                  <a:schemeClr val="tx1"/>
-                </a:solidFill>
-                <a:latin typeface="+mn-lt"/>
-                <a:ea typeface="+mn-ea"/>
-                <a:cs typeface="+mn-cs"/>
-              </a:defRPr>
-            </a:lvl5pPr>
-            <a:lvl6pPr marL="914400" indent="-137160" algn="l" defTabSz="914400" rtl="0" eaLnBrk="1" latinLnBrk="0" hangingPunct="1">
-              <a:lnSpc>
-                <a:spcPct val="90000"/>
-              </a:lnSpc>
-              <a:spcBef>
-                <a:spcPts val="200"/>
-              </a:spcBef>
-              <a:spcAft>
-                <a:spcPts val="400"/>
-              </a:spcAft>
-              <a:buClr>
-                <a:schemeClr val="accent1"/>
-              </a:buClr>
-              <a:buFont typeface="Wingdings 3" pitchFamily="18" charset="2"/>
-              <a:buChar char=""/>
-              <a:defRPr sz="1400" kern="1200">
-                <a:solidFill>
-                  <a:schemeClr val="tx1"/>
-                </a:solidFill>
-                <a:latin typeface="+mn-lt"/>
-                <a:ea typeface="+mn-ea"/>
-                <a:cs typeface="+mn-cs"/>
-              </a:defRPr>
-            </a:lvl6pPr>
-            <a:lvl7pPr marL="1060704" indent="-137160" algn="l" defTabSz="914400" rtl="0" eaLnBrk="1" latinLnBrk="0" hangingPunct="1">
-              <a:lnSpc>
-                <a:spcPct val="90000"/>
-              </a:lnSpc>
-              <a:spcBef>
-                <a:spcPts val="200"/>
-              </a:spcBef>
-              <a:spcAft>
-                <a:spcPts val="400"/>
-              </a:spcAft>
-              <a:buClr>
-                <a:schemeClr val="accent1"/>
-              </a:buClr>
-              <a:buFont typeface="Wingdings 3" pitchFamily="18" charset="2"/>
-              <a:buChar char=""/>
-              <a:defRPr sz="1400" kern="1200">
-                <a:solidFill>
-                  <a:schemeClr val="tx1"/>
-                </a:solidFill>
-                <a:latin typeface="+mn-lt"/>
-                <a:ea typeface="+mn-ea"/>
-                <a:cs typeface="+mn-cs"/>
-              </a:defRPr>
-            </a:lvl7pPr>
-            <a:lvl8pPr marL="1216152" indent="-137160" algn="l" defTabSz="914400" rtl="0" eaLnBrk="1" latinLnBrk="0" hangingPunct="1">
-              <a:lnSpc>
-                <a:spcPct val="90000"/>
-              </a:lnSpc>
-              <a:spcBef>
-                <a:spcPts val="200"/>
-              </a:spcBef>
-              <a:spcAft>
-                <a:spcPts val="400"/>
-              </a:spcAft>
-              <a:buClr>
-                <a:schemeClr val="accent1"/>
-              </a:buClr>
-              <a:buFont typeface="Wingdings 3" pitchFamily="18" charset="2"/>
-              <a:buChar char=""/>
-              <a:defRPr sz="1400" kern="1200">
-                <a:solidFill>
-                  <a:schemeClr val="tx1"/>
-                </a:solidFill>
-                <a:latin typeface="+mn-lt"/>
-                <a:ea typeface="+mn-ea"/>
-                <a:cs typeface="+mn-cs"/>
-              </a:defRPr>
-            </a:lvl8pPr>
-            <a:lvl9pPr marL="1362456" indent="-137160" algn="l" defTabSz="914400" rtl="0" eaLnBrk="1" latinLnBrk="0" hangingPunct="1">
-              <a:lnSpc>
-                <a:spcPct val="90000"/>
-              </a:lnSpc>
-              <a:spcBef>
-                <a:spcPts val="200"/>
-              </a:spcBef>
-              <a:spcAft>
-                <a:spcPts val="400"/>
-              </a:spcAft>
-              <a:buClr>
-                <a:schemeClr val="accent1"/>
-              </a:buClr>
-              <a:buFont typeface="Wingdings 3" pitchFamily="18" charset="2"/>
-              <a:buChar char=""/>
-              <a:defRPr sz="1400" kern="1200">
-                <a:solidFill>
-                  <a:schemeClr val="tx1"/>
-                </a:solidFill>
-                <a:latin typeface="+mn-lt"/>
-                <a:ea typeface="+mn-ea"/>
-                <a:cs typeface="+mn-cs"/>
-              </a:defRPr>
-            </a:lvl9pPr>
-          </a:lstStyle>
-          <a:p>
-            <a:pPr rtl="0"/>
-            <a:endParaRPr lang="it-IT"/>
           </a:p>
         </p:txBody>
       </p:sp>
@@ -33156,14 +32583,18 @@
             </a:r>
             <a:r>
               <a:rPr lang="it-IT" sz="1500" dirty="0"/>
-              <a:t>: è un dato dinamico che si aggiorna quotidianamente negli uffici anagrafe dei comuni, tenendo conto di nascite, morti, iscrizioni e cancellazioni per trasferimenti</a:t>
+              <a:t>: è un dato dinamico che si aggiorna quotidianamente negli uffici anagrafe dei comuni sulla base delle registrazioni relative a nascite, decessi, iscrizioni e cancellazioni anagrafiche conseguenti ai trasferimenti di residenza.</a:t>
             </a:r>
           </a:p>
           <a:p>
             <a:pPr lvl="1"/>
             <a:r>
+              <a:rPr lang="it-IT" sz="1500" b="1" dirty="0" err="1"/>
+              <a:t>Square</a:t>
+            </a:r>
+            <a:r>
               <a:rPr lang="it-IT" sz="1500" b="1" dirty="0"/>
-              <a:t>Square Kilometers</a:t>
+              <a:t> Kilometers</a:t>
             </a:r>
           </a:p>
           <a:p>
@@ -33174,13 +32605,24 @@
             </a:r>
             <a:r>
               <a:rPr lang="it-IT" sz="1500" dirty="0"/>
-              <a:t>: Vehicles / </a:t>
+              <a:t>: (</a:t>
+            </a:r>
+            <a:r>
+              <a:rPr lang="it-IT" sz="1500" dirty="0" err="1"/>
+              <a:t>Vehicles</a:t>
+            </a:r>
+            <a:r>
+              <a:rPr lang="it-IT" sz="1500" dirty="0"/>
+              <a:t> / </a:t>
             </a:r>
             <a:r>
               <a:rPr lang="it-IT" sz="1500" dirty="0" err="1"/>
               <a:t>Resident_population</a:t>
             </a:r>
-            <a:endParaRPr lang="it-IT" sz="1500" dirty="0"/>
+            <a:r>
+              <a:rPr lang="it-IT" sz="1500" dirty="0"/>
+              <a:t>) * 1000</a:t>
+            </a:r>
           </a:p>
           <a:p>
             <a:pPr lvl="1"/>
@@ -33243,7 +32685,7 @@
         </p:nvSpPr>
         <p:spPr>
           <a:xfrm>
-            <a:off x="8229883" y="1628800"/>
+            <a:off x="8229883" y="2266124"/>
             <a:ext cx="3410733" cy="1024855"/>
           </a:xfrm>
           <a:prstGeom prst="ellipse">
@@ -33293,8 +32735,8 @@
           </a:p>
         </p:txBody>
       </p:sp>
-      <mc:AlternateContent xmlns:mc="http://schemas.openxmlformats.org/markup-compatibility/2006" xmlns:a14="http://schemas.microsoft.com/office/drawing/2010/main">
-        <mc:Choice Requires="a14">
+      <mc:AlternateContent xmlns:mc="http://schemas.openxmlformats.org/markup-compatibility/2006">
+        <mc:Choice xmlns:a14="http://schemas.microsoft.com/office/drawing/2010/main" Requires="a14">
           <p:sp>
             <p:nvSpPr>
               <p:cNvPr id="4" name="CasellaDiTesto 3">
@@ -33309,8 +32751,8 @@
             </p:nvSpPr>
             <p:spPr>
               <a:xfrm>
-                <a:off x="5591944" y="3356992"/>
-                <a:ext cx="6246755" cy="3139321"/>
+                <a:off x="5879976" y="3404169"/>
+                <a:ext cx="6246755" cy="3477875"/>
               </a:xfrm>
               <a:prstGeom prst="rect">
                 <a:avLst/>
@@ -33332,14 +32774,14 @@
                     <m:sSub>
                       <m:sSubPr>
                         <m:ctrlPr>
-                          <a:rPr lang="it-IT" b="1" i="1" smtClean="0">
+                          <a:rPr lang="it-IT" sz="2000" b="1" i="1" smtClean="0">
                             <a:latin typeface="Cambria Math" panose="02040503050406030204" pitchFamily="18" charset="0"/>
                           </a:rPr>
                         </m:ctrlPr>
                       </m:sSubPr>
                       <m:e>
                         <m:r>
-                          <a:rPr lang="it-IT" b="1" i="1" smtClean="0">
+                          <a:rPr lang="it-IT" sz="2000" b="1" i="1" smtClean="0">
                             <a:latin typeface="Cambria Math" panose="02040503050406030204" pitchFamily="18" charset="0"/>
                             <a:ea typeface="Cambria Math" panose="02040503050406030204" pitchFamily="18" charset="0"/>
                           </a:rPr>
@@ -33348,7 +32790,7 @@
                       </m:e>
                       <m:sub>
                         <m:r>
-                          <a:rPr lang="it-IT" b="1" i="1" smtClean="0">
+                          <a:rPr lang="it-IT" sz="2000" b="1" i="1" smtClean="0">
                             <a:latin typeface="Cambria Math" panose="02040503050406030204" pitchFamily="18" charset="0"/>
                           </a:rPr>
                           <m:t>𝟏</m:t>
@@ -33358,29 +32800,29 @@
                   </m:oMath>
                 </a14:m>
                 <a:r>
-                  <a:rPr lang="it-IT" b="1" dirty="0"/>
+                  <a:rPr lang="it-IT" sz="2000" b="1" dirty="0"/>
                   <a:t> </a:t>
                 </a:r>
                 <a:r>
-                  <a:rPr lang="it-IT" b="1" dirty="0">
+                  <a:rPr lang="it-IT" sz="2000" b="1" dirty="0">
                     <a:sym typeface="Wingdings" panose="05000000000000000000" pitchFamily="2" charset="2"/>
                   </a:rPr>
                   <a:t> </a:t>
                 </a:r>
                 <a:r>
-                  <a:rPr lang="it-IT" b="1" dirty="0"/>
+                  <a:rPr lang="it-IT" sz="2000" b="1" dirty="0"/>
                   <a:t>1.000 residenti in più </a:t>
                 </a:r>
                 <a:r>
-                  <a:rPr lang="it-IT" dirty="0"/>
+                  <a:rPr lang="it-IT" sz="2000" dirty="0"/>
                   <a:t>sono associati a circa </a:t>
                 </a:r>
                 <a:r>
-                  <a:rPr lang="it-IT" b="1" dirty="0"/>
-                  <a:t>4 incidenti in più</a:t>
+                  <a:rPr lang="it-IT" sz="2000" b="1" dirty="0"/>
+                  <a:t>4,6 incidenti in più</a:t>
                 </a:r>
                 <a:r>
-                  <a:rPr lang="it-IT" dirty="0"/>
+                  <a:rPr lang="it-IT" sz="2000" dirty="0"/>
                   <a:t> (0,0046 × 1.000 = 4,6).</a:t>
                 </a:r>
               </a:p>
@@ -33394,14 +32836,14 @@
                     <m:sSub>
                       <m:sSubPr>
                         <m:ctrlPr>
-                          <a:rPr lang="it-IT" b="1" i="1">
+                          <a:rPr lang="it-IT" sz="2000" b="1" i="1">
                             <a:latin typeface="Cambria Math" panose="02040503050406030204" pitchFamily="18" charset="0"/>
                           </a:rPr>
                         </m:ctrlPr>
                       </m:sSubPr>
                       <m:e>
                         <m:r>
-                          <a:rPr lang="it-IT" b="1" i="1">
+                          <a:rPr lang="it-IT" sz="2000" b="1" i="1">
                             <a:latin typeface="Cambria Math" panose="02040503050406030204" pitchFamily="18" charset="0"/>
                             <a:ea typeface="Cambria Math" panose="02040503050406030204" pitchFamily="18" charset="0"/>
                           </a:rPr>
@@ -33410,7 +32852,7 @@
                       </m:e>
                       <m:sub>
                         <m:r>
-                          <a:rPr lang="it-IT" b="1" i="1" smtClean="0">
+                          <a:rPr lang="it-IT" sz="2000" b="1" i="1" smtClean="0">
                             <a:latin typeface="Cambria Math" panose="02040503050406030204" pitchFamily="18" charset="0"/>
                             <a:ea typeface="Cambria Math" panose="02040503050406030204" pitchFamily="18" charset="0"/>
                           </a:rPr>
@@ -33421,33 +32863,33 @@
                   </m:oMath>
                 </a14:m>
                 <a:r>
-                  <a:rPr lang="it-IT" dirty="0"/>
+                  <a:rPr lang="it-IT" sz="2000" dirty="0"/>
                   <a:t> </a:t>
                 </a:r>
                 <a:r>
-                  <a:rPr lang="it-IT" dirty="0">
+                  <a:rPr lang="it-IT" sz="2000" dirty="0">
                     <a:sym typeface="Wingdings" panose="05000000000000000000" pitchFamily="2" charset="2"/>
                   </a:rPr>
                   <a:t> </a:t>
                 </a:r>
                 <a:r>
-                  <a:rPr lang="it-IT" dirty="0"/>
+                  <a:rPr lang="it-IT" sz="2000" dirty="0"/>
                   <a:t>comuni </a:t>
                 </a:r>
                 <a:r>
-                  <a:rPr lang="it-IT" b="1" dirty="0"/>
+                  <a:rPr lang="it-IT" sz="2000" b="1" dirty="0"/>
                   <a:t>più estesi</a:t>
                 </a:r>
                 <a:r>
-                  <a:rPr lang="it-IT" dirty="0"/>
+                  <a:rPr lang="it-IT" sz="2000" dirty="0"/>
                   <a:t> tendono ad avere leggermente </a:t>
                 </a:r>
                 <a:r>
-                  <a:rPr lang="it-IT" b="1" dirty="0"/>
+                  <a:rPr lang="it-IT" sz="2000" b="1" dirty="0"/>
                   <a:t>meno incidenti</a:t>
                 </a:r>
                 <a:r>
-                  <a:rPr lang="it-IT" dirty="0"/>
+                  <a:rPr lang="it-IT" sz="2000" dirty="0"/>
                   <a:t>.</a:t>
                 </a:r>
               </a:p>
@@ -33461,14 +32903,14 @@
                     <m:sSub>
                       <m:sSubPr>
                         <m:ctrlPr>
-                          <a:rPr lang="it-IT" b="1" i="1">
+                          <a:rPr lang="it-IT" sz="2000" b="1" i="1">
                             <a:latin typeface="Cambria Math" panose="02040503050406030204" pitchFamily="18" charset="0"/>
                           </a:rPr>
                         </m:ctrlPr>
                       </m:sSubPr>
                       <m:e>
                         <m:r>
-                          <a:rPr lang="it-IT" b="1" i="1">
+                          <a:rPr lang="it-IT" sz="2000" b="1" i="1">
                             <a:latin typeface="Cambria Math" panose="02040503050406030204" pitchFamily="18" charset="0"/>
                             <a:ea typeface="Cambria Math" panose="02040503050406030204" pitchFamily="18" charset="0"/>
                           </a:rPr>
@@ -33477,7 +32919,7 @@
                       </m:e>
                       <m:sub>
                         <m:r>
-                          <a:rPr lang="it-IT" b="1" i="1" smtClean="0">
+                          <a:rPr lang="it-IT" sz="2000" b="1" i="1" smtClean="0">
                             <a:latin typeface="Cambria Math" panose="02040503050406030204" pitchFamily="18" charset="0"/>
                             <a:ea typeface="Cambria Math" panose="02040503050406030204" pitchFamily="18" charset="0"/>
                           </a:rPr>
@@ -33486,7 +32928,7 @@
                       </m:sub>
                     </m:sSub>
                     <m:r>
-                      <a:rPr lang="it-IT" b="1" i="1" smtClean="0">
+                      <a:rPr lang="it-IT" sz="2000" b="1" i="1" smtClean="0">
                         <a:latin typeface="Cambria Math" panose="02040503050406030204" pitchFamily="18" charset="0"/>
                         <a:ea typeface="Cambria Math" panose="02040503050406030204" pitchFamily="18" charset="0"/>
                       </a:rPr>
@@ -33495,53 +32937,53 @@
                   </m:oMath>
                 </a14:m>
                 <a:r>
-                  <a:rPr lang="it-IT" dirty="0">
+                  <a:rPr lang="it-IT" sz="2000" dirty="0">
                     <a:sym typeface="Wingdings" panose="05000000000000000000" pitchFamily="2" charset="2"/>
                   </a:rPr>
                   <a:t> </a:t>
                 </a:r>
                 <a:r>
-                  <a:rPr lang="it-IT" dirty="0"/>
+                  <a:rPr lang="it-IT" sz="2000" dirty="0"/>
                   <a:t>un aumento di </a:t>
                 </a:r>
                 <a:r>
-                  <a:rPr lang="it-IT" b="1" dirty="0"/>
+                  <a:rPr lang="it-IT" sz="2000" b="1" dirty="0"/>
                   <a:t>1 veicolo ogni 1.000 abitanti</a:t>
                 </a:r>
                 <a:r>
-                  <a:rPr lang="it-IT" dirty="0"/>
+                  <a:rPr lang="it-IT" sz="2000" dirty="0"/>
                   <a:t> è associato, in media, a un incremento di </a:t>
                 </a:r>
                 <a:r>
-                  <a:rPr lang="it-IT" b="1" dirty="0"/>
+                  <a:rPr lang="it-IT" sz="2000" b="1" dirty="0"/>
                   <a:t>0,0215 incidenti</a:t>
                 </a:r>
                 <a:r>
-                  <a:rPr lang="it-IT" dirty="0"/>
+                  <a:rPr lang="it-IT" sz="2000" dirty="0"/>
                   <a:t>. Un incremento di </a:t>
                 </a:r>
                 <a:r>
-                  <a:rPr lang="it-IT" b="1" dirty="0"/>
+                  <a:rPr lang="it-IT" sz="2000" b="1" dirty="0"/>
                   <a:t>100 punti</a:t>
                 </a:r>
                 <a:r>
-                  <a:rPr lang="it-IT" dirty="0"/>
+                  <a:rPr lang="it-IT" sz="2000" dirty="0"/>
                   <a:t> del tasso di motorizzazione, ad esempio da 800 a 900 </a:t>
                 </a:r>
                 <a:r>
-                  <a:rPr lang="it-IT" b="1" dirty="0"/>
+                  <a:rPr lang="it-IT" sz="2000" b="1" dirty="0"/>
                   <a:t>veicoli ogni 1.000 abitanti, </a:t>
                 </a:r>
                 <a:r>
-                  <a:rPr lang="it-IT" dirty="0"/>
+                  <a:rPr lang="it-IT" sz="2000" dirty="0"/>
                   <a:t> è associato a circa </a:t>
                 </a:r>
                 <a:r>
-                  <a:rPr lang="it-IT" b="1" dirty="0"/>
+                  <a:rPr lang="it-IT" sz="2000" b="1" dirty="0"/>
                   <a:t>2,15 incidenti aggiuntivi</a:t>
                 </a:r>
                 <a:r>
-                  <a:rPr lang="it-IT" dirty="0"/>
+                  <a:rPr lang="it-IT" sz="2000" dirty="0"/>
                   <a:t>.</a:t>
                 </a:r>
               </a:p>
@@ -33555,14 +32997,14 @@
                     <m:sSub>
                       <m:sSubPr>
                         <m:ctrlPr>
-                          <a:rPr lang="it-IT" b="1" i="1">
+                          <a:rPr lang="it-IT" sz="2000" b="1" i="1">
                             <a:latin typeface="Cambria Math" panose="02040503050406030204" pitchFamily="18" charset="0"/>
                           </a:rPr>
                         </m:ctrlPr>
                       </m:sSubPr>
                       <m:e>
                         <m:r>
-                          <a:rPr lang="it-IT" b="1" i="1">
+                          <a:rPr lang="it-IT" sz="2000" b="1" i="1">
                             <a:latin typeface="Cambria Math" panose="02040503050406030204" pitchFamily="18" charset="0"/>
                             <a:ea typeface="Cambria Math" panose="02040503050406030204" pitchFamily="18" charset="0"/>
                           </a:rPr>
@@ -33571,7 +33013,7 @@
                       </m:e>
                       <m:sub>
                         <m:r>
-                          <a:rPr lang="it-IT" b="1" i="1" smtClean="0">
+                          <a:rPr lang="it-IT" sz="2000" b="1" i="1" smtClean="0">
                             <a:latin typeface="Cambria Math" panose="02040503050406030204" pitchFamily="18" charset="0"/>
                             <a:ea typeface="Cambria Math" panose="02040503050406030204" pitchFamily="18" charset="0"/>
                           </a:rPr>
@@ -33582,32 +33024,32 @@
                   </m:oMath>
                 </a14:m>
                 <a:r>
-                  <a:rPr lang="it-IT" dirty="0"/>
+                  <a:rPr lang="it-IT" sz="2000" dirty="0"/>
                   <a:t> </a:t>
                 </a:r>
                 <a:r>
-                  <a:rPr lang="it-IT" dirty="0">
+                  <a:rPr lang="it-IT" sz="2000" dirty="0">
                     <a:sym typeface="Wingdings" panose="05000000000000000000" pitchFamily="2" charset="2"/>
                   </a:rPr>
                   <a:t> </a:t>
                 </a:r>
                 <a:r>
-                  <a:rPr lang="it-IT" dirty="0"/>
+                  <a:rPr lang="it-IT" sz="2000" dirty="0"/>
                   <a:t>il passaggio da un anno al successivo è associato a una diminuzione media di </a:t>
                 </a:r>
                 <a:r>
-                  <a:rPr lang="it-IT" b="1" dirty="0"/>
+                  <a:rPr lang="it-IT" sz="2000" b="1" dirty="0"/>
                   <a:t>0,13 incidenti</a:t>
                 </a:r>
                 <a:r>
-                  <a:rPr lang="it-IT" dirty="0"/>
+                  <a:rPr lang="it-IT" sz="2000" dirty="0"/>
                   <a:t>.</a:t>
                 </a:r>
               </a:p>
             </p:txBody>
           </p:sp>
         </mc:Choice>
-        <mc:Fallback xmlns="">
+        <mc:Fallback>
           <p:sp>
             <p:nvSpPr>
               <p:cNvPr id="4" name="CasellaDiTesto 3">
@@ -33624,8 +33066,8 @@
             </p:nvSpPr>
             <p:spPr>
               <a:xfrm>
-                <a:off x="5591944" y="3356992"/>
-                <a:ext cx="6246755" cy="3139321"/>
+                <a:off x="5879976" y="3404169"/>
+                <a:ext cx="6246755" cy="3477875"/>
               </a:xfrm>
               <a:prstGeom prst="rect">
                 <a:avLst/>
@@ -33633,7 +33075,7 @@
               <a:blipFill>
                 <a:blip r:embed="rId3"/>
                 <a:stretch>
-                  <a:fillRect l="-585" t="-1165" r="-1756" b="-2136"/>
+                  <a:fillRect l="-879" t="-876" r="-1172" b="-2102"/>
                 </a:stretch>
               </a:blipFill>
             </p:spPr>
@@ -33670,14 +33112,14 @@
           <p:nvPr>
             <p:extLst>
               <p:ext uri="{D42A27DB-BD31-4B8C-83A1-F6EECF244321}">
-                <p14:modId xmlns:p14="http://schemas.microsoft.com/office/powerpoint/2010/main" val="3068642574"/>
+                <p14:modId xmlns:p14="http://schemas.microsoft.com/office/powerpoint/2010/main" val="983032851"/>
               </p:ext>
             </p:extLst>
           </p:nvPr>
         </p:nvGraphicFramePr>
         <p:xfrm>
           <a:off x="551384" y="3453831"/>
-          <a:ext cx="5040561" cy="3149010"/>
+          <a:ext cx="5040561" cy="3381034"/>
         </p:xfrm>
         <a:graphic>
           <a:graphicData uri="http://schemas.openxmlformats.org/drawingml/2006/table">
@@ -33708,7 +33150,7 @@
                   </a:extLst>
                 </a:gridCol>
               </a:tblGrid>
-              <a:tr h="602565">
+              <a:tr h="646963">
                 <a:tc>
                   <a:txBody>
                     <a:bodyPr/>
@@ -33771,7 +33213,7 @@
                   </a:ext>
                 </a:extLst>
               </a:tr>
-              <a:tr h="452380">
+              <a:tr h="485712">
                 <a:tc>
                   <a:txBody>
                     <a:bodyPr/>
@@ -33832,7 +33274,7 @@
                   </a:ext>
                 </a:extLst>
               </a:tr>
-              <a:tr h="602565">
+              <a:tr h="646963">
                 <a:tc>
                   <a:txBody>
                     <a:bodyPr/>
@@ -33893,7 +33335,7 @@
                   </a:ext>
                 </a:extLst>
               </a:tr>
-              <a:tr h="452380">
+              <a:tr h="629972">
                 <a:tc>
                   <a:txBody>
                     <a:bodyPr/>
@@ -33954,7 +33396,7 @@
                   </a:ext>
                 </a:extLst>
               </a:tr>
-              <a:tr h="452380">
+              <a:tr h="485712">
                 <a:tc>
                   <a:txBody>
                     <a:bodyPr/>
@@ -34015,7 +33457,7 @@
                   </a:ext>
                 </a:extLst>
               </a:tr>
-              <a:tr h="452380">
+              <a:tr h="485712">
                 <a:tc>
                   <a:txBody>
                     <a:bodyPr/>
@@ -34080,6 +33522,413 @@
           </a:graphicData>
         </a:graphic>
       </p:graphicFrame>
+      <mc:AlternateContent xmlns:mc="http://schemas.openxmlformats.org/markup-compatibility/2006">
+        <mc:Choice xmlns:a14="http://schemas.microsoft.com/office/drawing/2010/main" Requires="a14">
+          <p:sp>
+            <p:nvSpPr>
+              <p:cNvPr id="2" name="CasellaDiTesto 1">
+                <a:extLst>
+                  <a:ext uri="{FF2B5EF4-FFF2-40B4-BE49-F238E27FC236}">
+                    <a16:creationId xmlns:a16="http://schemas.microsoft.com/office/drawing/2014/main" id="{9E46CFE2-5353-C29F-D864-2DAA49C2048E}"/>
+                  </a:ext>
+                </a:extLst>
+              </p:cNvPr>
+              <p:cNvSpPr txBox="1"/>
+              <p:nvPr/>
+            </p:nvSpPr>
+            <p:spPr>
+              <a:xfrm>
+                <a:off x="8230197" y="1258930"/>
+                <a:ext cx="1656184" cy="830997"/>
+              </a:xfrm>
+              <a:prstGeom prst="rect">
+                <a:avLst/>
+              </a:prstGeom>
+              <a:noFill/>
+            </p:spPr>
+            <p:txBody>
+              <a:bodyPr wrap="square" rtlCol="0">
+                <a:spAutoFit/>
+              </a:bodyPr>
+              <a:lstStyle/>
+              <a:p>
+                <a14:m>
+                  <m:oMath xmlns:m="http://schemas.openxmlformats.org/officeDocument/2006/math">
+                    <m:sSub>
+                      <m:sSubPr>
+                        <m:ctrlPr>
+                          <a:rPr lang="it-IT" sz="2400" i="1" smtClean="0">
+                            <a:latin typeface="Cambria Math" panose="02040503050406030204" pitchFamily="18" charset="0"/>
+                          </a:rPr>
+                        </m:ctrlPr>
+                      </m:sSubPr>
+                      <m:e>
+                        <m:r>
+                          <a:rPr lang="it-IT" sz="2400" b="0" i="1" smtClean="0">
+                            <a:latin typeface="Cambria Math" panose="02040503050406030204" pitchFamily="18" charset="0"/>
+                          </a:rPr>
+                          <m:t>𝐻</m:t>
+                        </m:r>
+                      </m:e>
+                      <m:sub>
+                        <m:r>
+                          <a:rPr lang="it-IT" sz="2400" b="0" i="1" smtClean="0">
+                            <a:latin typeface="Cambria Math" panose="02040503050406030204" pitchFamily="18" charset="0"/>
+                          </a:rPr>
+                          <m:t>𝑜</m:t>
+                        </m:r>
+                      </m:sub>
+                    </m:sSub>
+                  </m:oMath>
+                </a14:m>
+                <a:r>
+                  <a:rPr lang="it-IT" sz="2400" dirty="0"/>
+                  <a:t>: </a:t>
+                </a:r>
+                <a14:m>
+                  <m:oMath xmlns:m="http://schemas.openxmlformats.org/officeDocument/2006/math">
+                    <m:sSub>
+                      <m:sSubPr>
+                        <m:ctrlPr>
+                          <a:rPr lang="it-IT" sz="2400" i="1">
+                            <a:latin typeface="Cambria Math" panose="02040503050406030204" pitchFamily="18" charset="0"/>
+                          </a:rPr>
+                        </m:ctrlPr>
+                      </m:sSubPr>
+                      <m:e>
+                        <m:r>
+                          <a:rPr lang="it-IT" sz="2400" b="0" i="1">
+                            <a:latin typeface="Cambria Math" panose="02040503050406030204" pitchFamily="18" charset="0"/>
+                            <a:ea typeface="Cambria Math" panose="02040503050406030204" pitchFamily="18" charset="0"/>
+                          </a:rPr>
+                          <m:t>𝛽</m:t>
+                        </m:r>
+                      </m:e>
+                      <m:sub>
+                        <m:r>
+                          <a:rPr lang="it-IT" sz="2400" b="0" i="1" smtClean="0">
+                            <a:latin typeface="Cambria Math" panose="02040503050406030204" pitchFamily="18" charset="0"/>
+                            <a:ea typeface="Cambria Math" panose="02040503050406030204" pitchFamily="18" charset="0"/>
+                          </a:rPr>
+                          <m:t>𝑘</m:t>
+                        </m:r>
+                      </m:sub>
+                    </m:sSub>
+                  </m:oMath>
+                </a14:m>
+                <a:r>
+                  <a:rPr lang="it-IT" sz="2400" dirty="0"/>
+                  <a:t> = 0</a:t>
+                </a:r>
+              </a:p>
+              <a:p>
+                <a14:m>
+                  <m:oMath xmlns:m="http://schemas.openxmlformats.org/officeDocument/2006/math">
+                    <m:sSub>
+                      <m:sSubPr>
+                        <m:ctrlPr>
+                          <a:rPr lang="it-IT" sz="2400" i="1">
+                            <a:latin typeface="Cambria Math" panose="02040503050406030204" pitchFamily="18" charset="0"/>
+                          </a:rPr>
+                        </m:ctrlPr>
+                      </m:sSubPr>
+                      <m:e>
+                        <m:r>
+                          <a:rPr lang="it-IT" sz="2400" b="0" i="1">
+                            <a:latin typeface="Cambria Math" panose="02040503050406030204" pitchFamily="18" charset="0"/>
+                          </a:rPr>
+                          <m:t>𝐻</m:t>
+                        </m:r>
+                      </m:e>
+                      <m:sub>
+                        <m:r>
+                          <a:rPr lang="it-IT" sz="2400" b="0" i="1" smtClean="0">
+                            <a:latin typeface="Cambria Math" panose="02040503050406030204" pitchFamily="18" charset="0"/>
+                          </a:rPr>
+                          <m:t>1</m:t>
+                        </m:r>
+                      </m:sub>
+                    </m:sSub>
+                  </m:oMath>
+                </a14:m>
+                <a:r>
+                  <a:rPr lang="it-IT" sz="2400" dirty="0"/>
+                  <a:t>: </a:t>
+                </a:r>
+                <a14:m>
+                  <m:oMath xmlns:m="http://schemas.openxmlformats.org/officeDocument/2006/math">
+                    <m:sSub>
+                      <m:sSubPr>
+                        <m:ctrlPr>
+                          <a:rPr lang="it-IT" sz="2400" i="1">
+                            <a:latin typeface="Cambria Math" panose="02040503050406030204" pitchFamily="18" charset="0"/>
+                          </a:rPr>
+                        </m:ctrlPr>
+                      </m:sSubPr>
+                      <m:e>
+                        <m:r>
+                          <a:rPr lang="it-IT" sz="2400" b="0" i="1">
+                            <a:latin typeface="Cambria Math" panose="02040503050406030204" pitchFamily="18" charset="0"/>
+                            <a:ea typeface="Cambria Math" panose="02040503050406030204" pitchFamily="18" charset="0"/>
+                          </a:rPr>
+                          <m:t>𝛽</m:t>
+                        </m:r>
+                      </m:e>
+                      <m:sub>
+                        <m:r>
+                          <a:rPr lang="it-IT" sz="2400" b="0" i="1">
+                            <a:latin typeface="Cambria Math" panose="02040503050406030204" pitchFamily="18" charset="0"/>
+                            <a:ea typeface="Cambria Math" panose="02040503050406030204" pitchFamily="18" charset="0"/>
+                          </a:rPr>
+                          <m:t>𝑘</m:t>
+                        </m:r>
+                      </m:sub>
+                    </m:sSub>
+                  </m:oMath>
+                </a14:m>
+                <a:r>
+                  <a:rPr lang="it-IT" sz="2400" dirty="0"/>
+                  <a:t> </a:t>
+                </a:r>
+                <a14:m>
+                  <m:oMath xmlns:m="http://schemas.openxmlformats.org/officeDocument/2006/math">
+                    <m:r>
+                      <a:rPr lang="it-IT" sz="2400" b="0" i="1" dirty="0" smtClean="0">
+                        <a:latin typeface="Cambria Math" panose="02040503050406030204" pitchFamily="18" charset="0"/>
+                        <a:ea typeface="Cambria Math" panose="02040503050406030204" pitchFamily="18" charset="0"/>
+                      </a:rPr>
+                      <m:t>≠</m:t>
+                    </m:r>
+                  </m:oMath>
+                </a14:m>
+                <a:r>
+                  <a:rPr lang="it-IT" sz="2400" dirty="0"/>
+                  <a:t> 0</a:t>
+                </a:r>
+              </a:p>
+            </p:txBody>
+          </p:sp>
+        </mc:Choice>
+        <mc:Fallback>
+          <p:sp>
+            <p:nvSpPr>
+              <p:cNvPr id="2" name="CasellaDiTesto 1">
+                <a:extLst>
+                  <a:ext uri="{FF2B5EF4-FFF2-40B4-BE49-F238E27FC236}">
+                    <a16:creationId xmlns:a16="http://schemas.microsoft.com/office/drawing/2014/main" id="{9E46CFE2-5353-C29F-D864-2DAA49C2048E}"/>
+                  </a:ext>
+                </a:extLst>
+              </p:cNvPr>
+              <p:cNvSpPr txBox="1">
+                <a:spLocks noRot="1" noChangeAspect="1" noMove="1" noResize="1" noEditPoints="1" noAdjustHandles="1" noChangeArrowheads="1" noChangeShapeType="1" noTextEdit="1"/>
+              </p:cNvSpPr>
+              <p:nvPr/>
+            </p:nvSpPr>
+            <p:spPr>
+              <a:xfrm>
+                <a:off x="8230197" y="1258930"/>
+                <a:ext cx="1656184" cy="830997"/>
+              </a:xfrm>
+              <a:prstGeom prst="rect">
+                <a:avLst/>
+              </a:prstGeom>
+              <a:blipFill>
+                <a:blip r:embed="rId4"/>
+                <a:stretch>
+                  <a:fillRect l="-735" t="-5882" b="-16176"/>
+                </a:stretch>
+              </a:blipFill>
+            </p:spPr>
+            <p:txBody>
+              <a:bodyPr/>
+              <a:lstStyle/>
+              <a:p>
+                <a:r>
+                  <a:rPr lang="it-IT">
+                    <a:noFill/>
+                  </a:rPr>
+                  <a:t> </a:t>
+                </a:r>
+              </a:p>
+            </p:txBody>
+          </p:sp>
+        </mc:Fallback>
+      </mc:AlternateContent>
+      <mc:AlternateContent xmlns:mc="http://schemas.openxmlformats.org/markup-compatibility/2006">
+        <mc:Choice xmlns:a14="http://schemas.microsoft.com/office/drawing/2010/main" Requires="a14">
+          <p:sp>
+            <p:nvSpPr>
+              <p:cNvPr id="7" name="CasellaDiTesto 6">
+                <a:extLst>
+                  <a:ext uri="{FF2B5EF4-FFF2-40B4-BE49-F238E27FC236}">
+                    <a16:creationId xmlns:a16="http://schemas.microsoft.com/office/drawing/2014/main" id="{642EC835-C19B-E294-939B-8258FA9660FB}"/>
+                  </a:ext>
+                </a:extLst>
+              </p:cNvPr>
+              <p:cNvSpPr txBox="1"/>
+              <p:nvPr/>
+            </p:nvSpPr>
+            <p:spPr>
+              <a:xfrm>
+                <a:off x="10488488" y="1445047"/>
+                <a:ext cx="1330492" cy="461665"/>
+              </a:xfrm>
+              <a:prstGeom prst="rect">
+                <a:avLst/>
+              </a:prstGeom>
+              <a:noFill/>
+            </p:spPr>
+            <p:txBody>
+              <a:bodyPr wrap="none" rtlCol="0">
+                <a:spAutoFit/>
+              </a:bodyPr>
+              <a:lstStyle/>
+              <a:p>
+                <a14:m>
+                  <m:oMath xmlns:m="http://schemas.openxmlformats.org/officeDocument/2006/math">
+                    <m:r>
+                      <a:rPr lang="it-IT" sz="2400" i="1" smtClean="0">
+                        <a:latin typeface="Cambria Math" panose="02040503050406030204" pitchFamily="18" charset="0"/>
+                        <a:ea typeface="Cambria Math" panose="02040503050406030204" pitchFamily="18" charset="0"/>
+                      </a:rPr>
+                      <m:t>𝛼</m:t>
+                    </m:r>
+                  </m:oMath>
+                </a14:m>
+                <a:r>
+                  <a:rPr lang="it-IT" sz="2400" dirty="0"/>
+                  <a:t> = 0,05</a:t>
+                </a:r>
+              </a:p>
+            </p:txBody>
+          </p:sp>
+        </mc:Choice>
+        <mc:Fallback>
+          <p:sp>
+            <p:nvSpPr>
+              <p:cNvPr id="7" name="CasellaDiTesto 6">
+                <a:extLst>
+                  <a:ext uri="{FF2B5EF4-FFF2-40B4-BE49-F238E27FC236}">
+                    <a16:creationId xmlns:a16="http://schemas.microsoft.com/office/drawing/2014/main" id="{642EC835-C19B-E294-939B-8258FA9660FB}"/>
+                  </a:ext>
+                </a:extLst>
+              </p:cNvPr>
+              <p:cNvSpPr txBox="1">
+                <a:spLocks noRot="1" noChangeAspect="1" noMove="1" noResize="1" noEditPoints="1" noAdjustHandles="1" noChangeArrowheads="1" noChangeShapeType="1" noTextEdit="1"/>
+              </p:cNvSpPr>
+              <p:nvPr/>
+            </p:nvSpPr>
+            <p:spPr>
+              <a:xfrm>
+                <a:off x="10488488" y="1445047"/>
+                <a:ext cx="1330492" cy="461665"/>
+              </a:xfrm>
+              <a:prstGeom prst="rect">
+                <a:avLst/>
+              </a:prstGeom>
+              <a:blipFill>
+                <a:blip r:embed="rId5"/>
+                <a:stretch>
+                  <a:fillRect t="-10526" r="-6422" b="-28947"/>
+                </a:stretch>
+              </a:blipFill>
+            </p:spPr>
+            <p:txBody>
+              <a:bodyPr/>
+              <a:lstStyle/>
+              <a:p>
+                <a:r>
+                  <a:rPr lang="it-IT">
+                    <a:noFill/>
+                  </a:rPr>
+                  <a:t> </a:t>
+                </a:r>
+              </a:p>
+            </p:txBody>
+          </p:sp>
+        </mc:Fallback>
+      </mc:AlternateContent>
+      <p:pic>
+        <p:nvPicPr>
+          <p:cNvPr id="8" name="Segnaposto immagine 5">
+            <a:extLst>
+              <a:ext uri="{FF2B5EF4-FFF2-40B4-BE49-F238E27FC236}">
+                <a16:creationId xmlns:a16="http://schemas.microsoft.com/office/drawing/2014/main" id="{A416CC04-BF1C-D8A5-163F-DDC76557BC14}"/>
+              </a:ext>
+              <a:ext uri="{C183D7F6-B498-43B3-948B-1728B52AA6E4}">
+                <adec:decorative xmlns:adec="http://schemas.microsoft.com/office/drawing/2017/decorative" val="1"/>
+              </a:ext>
+            </a:extLst>
+          </p:cNvPr>
+          <p:cNvPicPr>
+            <a:picLocks noChangeAspect="1"/>
+          </p:cNvPicPr>
+          <p:nvPr/>
+        </p:nvPicPr>
+        <p:blipFill rotWithShape="1">
+          <a:blip r:embed="rId6" cstate="screen">
+            <a:extLst>
+              <a:ext uri="{28A0092B-C50C-407E-A947-70E740481C1C}">
+                <a14:useLocalDpi xmlns:a14="http://schemas.microsoft.com/office/drawing/2010/main"/>
+              </a:ext>
+            </a:extLst>
+          </a:blip>
+          <a:srcRect t="88" b="88"/>
+          <a:stretch/>
+        </p:blipFill>
+        <p:spPr>
+          <a:xfrm>
+            <a:off x="0" y="0"/>
+            <a:ext cx="8329613" cy="457200"/>
+          </a:xfrm>
+          <a:custGeom>
+            <a:avLst/>
+            <a:gdLst>
+              <a:gd name="connsiteX0" fmla="*/ 0 w 8329286"/>
+              <a:gd name="connsiteY0" fmla="*/ 0 h 457200"/>
+              <a:gd name="connsiteX1" fmla="*/ 8329286 w 8329286"/>
+              <a:gd name="connsiteY1" fmla="*/ 0 h 457200"/>
+              <a:gd name="connsiteX2" fmla="*/ 7982281 w 8329286"/>
+              <a:gd name="connsiteY2" fmla="*/ 457200 h 457200"/>
+              <a:gd name="connsiteX3" fmla="*/ 0 w 8329286"/>
+              <a:gd name="connsiteY3" fmla="*/ 457200 h 457200"/>
+            </a:gdLst>
+            <a:ahLst/>
+            <a:cxnLst>
+              <a:cxn ang="0">
+                <a:pos x="connsiteX0" y="connsiteY0"/>
+              </a:cxn>
+              <a:cxn ang="0">
+                <a:pos x="connsiteX1" y="connsiteY1"/>
+              </a:cxn>
+              <a:cxn ang="0">
+                <a:pos x="connsiteX2" y="connsiteY2"/>
+              </a:cxn>
+              <a:cxn ang="0">
+                <a:pos x="connsiteX3" y="connsiteY3"/>
+              </a:cxn>
+            </a:cxnLst>
+            <a:rect l="l" t="t" r="r" b="b"/>
+            <a:pathLst>
+              <a:path w="8329286" h="457200">
+                <a:moveTo>
+                  <a:pt x="0" y="0"/>
+                </a:moveTo>
+                <a:lnTo>
+                  <a:pt x="8329286" y="0"/>
+                </a:lnTo>
+                <a:lnTo>
+                  <a:pt x="7982281" y="457200"/>
+                </a:lnTo>
+                <a:lnTo>
+                  <a:pt x="0" y="457200"/>
+                </a:lnTo>
+                <a:close/>
+              </a:path>
+            </a:pathLst>
+          </a:custGeom>
+        </p:spPr>
+      </p:pic>
     </p:spTree>
     <p:extLst>
       <p:ext uri="{BB962C8B-B14F-4D97-AF65-F5344CB8AC3E}">
@@ -34139,7 +33988,9 @@
           </a:xfrm>
         </p:spPr>
         <p:txBody>
-          <a:bodyPr rtlCol="0"/>
+          <a:bodyPr rtlCol="0">
+            <a:normAutofit/>
+          </a:bodyPr>
           <a:lstStyle/>
           <a:p>
             <a:pPr rtl="0"/>
@@ -34149,7 +34000,7 @@
                   <a:srgbClr val="FF0000"/>
                 </a:solidFill>
               </a:rPr>
-              <a:t>INDIVIDUAZIONE DELLE CITTA’ E LE AREE DI INTERESSE</a:t>
+              <a:t>INDIVIDUAZIONE DELLE CITTÀ E LE AREE DI INTERESSE</a:t>
             </a:r>
           </a:p>
         </p:txBody>
@@ -34296,7 +34147,7 @@
         <p:spPr>
           <a:xfrm>
             <a:off x="7392144" y="1528522"/>
-            <a:ext cx="1152128" cy="1603102"/>
+            <a:ext cx="1152128" cy="1587581"/>
           </a:xfrm>
           <a:prstGeom prst="rect">
             <a:avLst/>
@@ -34395,8 +34246,8 @@
         </p:nvSpPr>
         <p:spPr>
           <a:xfrm>
-            <a:off x="6312024" y="5373216"/>
-            <a:ext cx="3600400" cy="1168460"/>
+            <a:off x="6348028" y="5373216"/>
+            <a:ext cx="3564396" cy="1168460"/>
           </a:xfrm>
           <a:prstGeom prst="rect">
             <a:avLst/>
@@ -34637,7 +34488,7 @@
         <p:spPr>
           <a:xfrm>
             <a:off x="7025353" y="1541280"/>
-            <a:ext cx="1086871" cy="1383664"/>
+            <a:ext cx="1086871" cy="1311656"/>
           </a:xfrm>
           <a:prstGeom prst="rect">
             <a:avLst/>
@@ -34859,61 +34710,72 @@
             <p:spPr>
               <a:xfrm>
                 <a:off x="548640" y="1412776"/>
-                <a:ext cx="11452016" cy="4927064"/>
+                <a:ext cx="11452016" cy="5445224"/>
               </a:xfrm>
             </p:spPr>
             <p:txBody>
               <a:bodyPr rtlCol="0">
-                <a:normAutofit fontScale="85000" lnSpcReduction="10000"/>
+                <a:noAutofit/>
               </a:bodyPr>
               <a:lstStyle/>
               <a:p>
                 <a:r>
-                  <a:rPr lang="it-IT" dirty="0">
+                  <a:rPr lang="it-IT" sz="1600" dirty="0">
                     <a:sym typeface="Wingdings" panose="05000000000000000000" pitchFamily="2" charset="2"/>
                   </a:rPr>
                   <a:t>Le analisi descrittive </a:t>
                 </a:r>
                 <a:r>
-                  <a:rPr lang="it-IT" dirty="0"/>
+                  <a:rPr lang="it-IT" sz="1600" dirty="0"/>
                   <a:t>mostrano che </a:t>
                 </a:r>
                 <a:r>
-                  <a:rPr lang="it-IT" b="1" dirty="0"/>
+                  <a:rPr lang="it-IT" sz="1600" b="1" dirty="0"/>
                   <a:t>Milano</a:t>
                 </a:r>
                 <a:r>
-                  <a:rPr lang="it-IT" dirty="0"/>
+                  <a:rPr lang="it-IT" sz="1600" dirty="0"/>
                   <a:t> rappresenta il </a:t>
                 </a:r>
                 <a:r>
-                  <a:rPr lang="it-IT" u="sng" dirty="0"/>
+                  <a:rPr lang="it-IT" sz="1600" u="sng" dirty="0"/>
                   <a:t>comune prioritario</a:t>
                 </a:r>
                 <a:r>
-                  <a:rPr lang="it-IT" dirty="0"/>
+                  <a:rPr lang="it-IT" sz="1600" dirty="0"/>
                   <a:t> per eventuali interventi, poiché registra contemporaneamente un </a:t>
                 </a:r>
                 <a:r>
-                  <a:rPr lang="it-IT" u="sng" dirty="0"/>
+                  <a:rPr lang="it-IT" sz="1600" u="sng" dirty="0"/>
                   <a:t>elevato numero di incidenti</a:t>
                 </a:r>
                 <a:r>
-                  <a:rPr lang="it-IT" dirty="0"/>
+                  <a:rPr lang="it-IT" sz="1600" dirty="0"/>
                   <a:t> (7,7 k media annuale) e la </a:t>
                 </a:r>
                 <a:r>
-                  <a:rPr lang="it-IT" u="sng" dirty="0">
+                  <a:rPr lang="it-IT" sz="1600" u="sng" dirty="0">
                     <a:effectLst/>
                   </a:rPr>
-                  <a:t>maggiore concentrazione di incidenti per </a:t>
+                  <a:t>maggiore concentrazione di incidenti </a:t>
+                </a:r>
+                <a:br>
+                  <a:rPr lang="it-IT" sz="1600" u="sng" dirty="0">
+                    <a:effectLst/>
+                  </a:rPr>
+                </a:br>
+                <a:r>
+                  <a:rPr lang="it-IT" sz="1600" u="sng" dirty="0">
+                    <a:effectLst/>
+                  </a:rPr>
+                  <a:t>per </a:t>
                 </a:r>
                 <a14:m>
                   <m:oMath xmlns:m="http://schemas.openxmlformats.org/officeDocument/2006/math">
                     <m:sSup>
                       <m:sSupPr>
                         <m:ctrlPr>
-                          <a:rPr lang="it-IT" i="1" u="sng">
+                          <a:rPr lang="it-IT" sz="1600" i="1" u="sng">
                             <a:effectLst/>
                             <a:latin typeface="Cambria Math" panose="02040503050406030204" pitchFamily="18" charset="0"/>
                           </a:rPr>
@@ -34921,7 +34783,7 @@
                       </m:sSupPr>
                       <m:e>
                         <m:r>
-                          <a:rPr lang="it-IT" b="0" i="1" u="sng">
+                          <a:rPr lang="it-IT" sz="1600" b="0" i="1" u="sng">
                             <a:effectLst/>
                             <a:latin typeface="Cambria Math" panose="02040503050406030204" pitchFamily="18" charset="0"/>
                           </a:rPr>
@@ -34930,7 +34792,7 @@
                       </m:e>
                       <m:sup>
                         <m:r>
-                          <a:rPr lang="it-IT" b="0" i="1" u="sng">
+                          <a:rPr lang="it-IT" sz="1600" b="0" i="1" u="sng">
                             <a:effectLst/>
                             <a:latin typeface="Cambria Math" panose="02040503050406030204" pitchFamily="18" charset="0"/>
                           </a:rPr>
@@ -34941,284 +34803,288 @@
                   </m:oMath>
                 </a14:m>
                 <a:r>
-                  <a:rPr lang="it-IT" dirty="0"/>
+                  <a:rPr lang="it-IT" sz="1600" dirty="0"/>
                   <a:t> (42 – media annuale).</a:t>
                 </a:r>
                 <a:br>
-                  <a:rPr lang="it-IT" dirty="0"/>
+                  <a:rPr lang="it-IT" sz="1600" dirty="0"/>
                 </a:br>
                 <a:r>
-                  <a:rPr lang="it-IT" dirty="0"/>
+                  <a:rPr lang="it-IT" sz="1600" dirty="0"/>
                   <a:t>Si aggiunge </a:t>
                 </a:r>
                 <a:r>
-                  <a:rPr lang="it-IT" b="1" dirty="0"/>
+                  <a:rPr lang="it-IT" sz="1600" b="1" dirty="0"/>
                   <a:t>Bergamo</a:t>
                 </a:r>
                 <a:r>
-                  <a:rPr lang="it-IT" dirty="0"/>
+                  <a:rPr lang="it-IT" sz="1600" dirty="0"/>
                   <a:t> che evidenzia il </a:t>
                 </a:r>
                 <a:r>
-                  <a:rPr lang="it-IT" u="sng" dirty="0"/>
+                  <a:rPr lang="it-IT" sz="1600" u="sng" dirty="0"/>
                   <a:t>più alto tasso di incidenti ogni 1000 abitanti</a:t>
                 </a:r>
                 <a:r>
-                  <a:rPr lang="it-IT" dirty="0"/>
+                  <a:rPr lang="it-IT" sz="1600" dirty="0"/>
                   <a:t> (7,4 m. a.) e il </a:t>
                 </a:r>
                 <a:r>
-                  <a:rPr lang="it-IT" u="sng" dirty="0"/>
+                  <a:rPr lang="it-IT" sz="1600" u="sng" dirty="0"/>
                   <a:t>più alto tasso di incidenti ogni 1000 veicoli</a:t>
                 </a:r>
                 <a:r>
-                  <a:rPr lang="it-IT" dirty="0"/>
+                  <a:rPr lang="it-IT" sz="1600" dirty="0"/>
                   <a:t> (8,5 m. a).</a:t>
                 </a:r>
                 <a:br>
-                  <a:rPr lang="it-IT" dirty="0"/>
+                  <a:rPr lang="it-IT" sz="1600" dirty="0"/>
                 </a:br>
                 <a:r>
-                  <a:rPr lang="it-IT" dirty="0"/>
-                  <a:t>Risultano nelle prime posizioni dei tre principali indici le città di </a:t>
+                  <a:rPr lang="it-IT" sz="1600" dirty="0"/>
+                  <a:t>Risultano nelle prime posizioni, dei tre principali indici, le città di </a:t>
                 </a:r>
                 <a:r>
-                  <a:rPr lang="it-IT" b="1" dirty="0"/>
+                  <a:rPr lang="it-IT" sz="1600" b="1" dirty="0"/>
                   <a:t>Genova</a:t>
                 </a:r>
                 <a:r>
-                  <a:rPr lang="it-IT" dirty="0"/>
+                  <a:rPr lang="it-IT" sz="1600" dirty="0"/>
                   <a:t>, </a:t>
                 </a:r>
                 <a:r>
-                  <a:rPr lang="it-IT" b="1" dirty="0"/>
+                  <a:rPr lang="it-IT" sz="1600" b="1" dirty="0"/>
                   <a:t>Firenze</a:t>
                 </a:r>
                 <a:r>
-                  <a:rPr lang="it-IT" dirty="0"/>
+                  <a:rPr lang="it-IT" sz="1600" dirty="0"/>
                   <a:t> e </a:t>
                 </a:r>
                 <a:r>
-                  <a:rPr lang="it-IT" b="1" dirty="0"/>
+                  <a:rPr lang="it-IT" sz="1600" b="1" dirty="0"/>
                   <a:t>Pisa</a:t>
                 </a:r>
                 <a:r>
-                  <a:rPr lang="it-IT" dirty="0"/>
+                  <a:rPr lang="it-IT" sz="1600" dirty="0"/>
                   <a:t>, senza tralasciare le città di </a:t>
                 </a:r>
                 <a:r>
-                  <a:rPr lang="it-IT" b="1" dirty="0"/>
+                  <a:rPr lang="it-IT" sz="1600" b="1" dirty="0"/>
                   <a:t>Bologna</a:t>
                 </a:r>
                 <a:r>
-                  <a:rPr lang="it-IT" dirty="0"/>
+                  <a:rPr lang="it-IT" sz="1600" dirty="0"/>
                   <a:t>, </a:t>
                 </a:r>
                 <a:r>
-                  <a:rPr lang="it-IT" b="1" dirty="0"/>
+                  <a:rPr lang="it-IT" sz="1600" b="1" dirty="0"/>
                   <a:t>Torino</a:t>
                 </a:r>
                 <a:r>
-                  <a:rPr lang="it-IT" dirty="0"/>
+                  <a:rPr lang="it-IT" sz="1600" dirty="0"/>
                   <a:t>, </a:t>
                 </a:r>
                 <a:r>
-                  <a:rPr lang="it-IT" b="1" dirty="0"/>
+                  <a:rPr lang="it-IT" sz="1600" b="1" dirty="0"/>
                   <a:t>Napoli</a:t>
                 </a:r>
                 <a:r>
-                  <a:rPr lang="it-IT" dirty="0"/>
+                  <a:rPr lang="it-IT" sz="1600" dirty="0"/>
                   <a:t> e </a:t>
                 </a:r>
                 <a:r>
-                  <a:rPr lang="it-IT" b="1" dirty="0"/>
+                  <a:rPr lang="it-IT" sz="1600" b="1" dirty="0"/>
                   <a:t>Monza</a:t>
                 </a:r>
                 <a:r>
-                  <a:rPr lang="it-IT" dirty="0"/>
+                  <a:rPr lang="it-IT" sz="1600" dirty="0"/>
                   <a:t>.</a:t>
                 </a:r>
                 <a:br>
-                  <a:rPr lang="it-IT" dirty="0"/>
+                  <a:rPr lang="it-IT" sz="1600" dirty="0"/>
                 </a:br>
                 <a:r>
-                  <a:rPr lang="it-IT" dirty="0"/>
+                  <a:rPr lang="it-IT" sz="1600" dirty="0"/>
                   <a:t>Interessante, come visto nei grafici precedenti, è la </a:t>
                 </a:r>
                 <a:r>
-                  <a:rPr lang="it-IT" b="1" dirty="0"/>
+                  <a:rPr lang="it-IT" sz="1600" b="1" dirty="0"/>
                   <a:t>provincia di Milano</a:t>
                 </a:r>
                 <a:r>
-                  <a:rPr lang="it-IT" dirty="0"/>
+                  <a:rPr lang="it-IT" sz="1600" dirty="0"/>
                   <a:t> con tante città che presentano indici molto elevati, pur essendo non grandi città; la </a:t>
                 </a:r>
                 <a:r>
-                  <a:rPr lang="it-IT" b="1" dirty="0"/>
+                  <a:rPr lang="it-IT" sz="1600" b="1" dirty="0"/>
                   <a:t>regione Toscana</a:t>
                 </a:r>
                 <a:r>
-                  <a:rPr lang="it-IT" dirty="0"/>
+                  <a:rPr lang="it-IT" sz="1600" dirty="0"/>
                   <a:t>; e, infine, diverse </a:t>
                 </a:r>
                 <a:r>
-                  <a:rPr lang="it-IT" b="1" dirty="0"/>
+                  <a:rPr lang="it-IT" sz="1600" b="1" dirty="0"/>
                   <a:t>località</a:t>
                 </a:r>
                 <a:r>
-                  <a:rPr lang="it-IT" dirty="0"/>
+                  <a:rPr lang="it-IT" sz="1600" dirty="0"/>
                   <a:t> soprattutto </a:t>
                 </a:r>
                 <a:r>
-                  <a:rPr lang="it-IT" b="1" dirty="0"/>
+                  <a:rPr lang="it-IT" sz="1600" b="1" dirty="0"/>
                   <a:t>balneari/costiere</a:t>
                 </a:r>
                 <a:r>
-                  <a:rPr lang="it-IT" dirty="0"/>
+                  <a:rPr lang="it-IT" sz="1600" dirty="0"/>
                   <a:t>.</a:t>
                 </a:r>
               </a:p>
               <a:p>
                 <a:r>
-                  <a:rPr lang="it-IT" dirty="0"/>
+                  <a:rPr lang="it-IT" sz="1600" dirty="0"/>
                   <a:t>Il </a:t>
                 </a:r>
                 <a:r>
-                  <a:rPr lang="it-IT" u="sng" dirty="0"/>
+                  <a:rPr lang="it-IT" sz="1600" u="sng" dirty="0"/>
                   <a:t>modello di regressione lineare multipla</a:t>
                 </a:r>
                 <a:r>
-                  <a:rPr lang="it-IT" dirty="0"/>
+                  <a:rPr lang="it-IT" sz="1600" dirty="0"/>
                   <a:t> ha evidenziato </a:t>
                 </a:r>
                 <a:r>
-                  <a:rPr lang="it-IT" b="1" dirty="0"/>
+                  <a:rPr lang="it-IT" sz="1600" b="1" dirty="0"/>
                   <a:t>un'elevata capacità esplicativa</a:t>
                 </a:r>
                 <a:r>
-                  <a:rPr lang="it-IT" dirty="0"/>
+                  <a:rPr lang="it-IT" sz="1600" dirty="0"/>
                   <a:t> (</a:t>
                 </a:r>
                 <a:r>
-                  <a:rPr lang="it-IT" b="1" dirty="0"/>
-                  <a:t>R² = 0,957</a:t>
+                  <a:rPr lang="it-IT" sz="1600" b="1" dirty="0"/>
+                  <a:t>R² = 0,948</a:t>
                 </a:r>
                 <a:r>
-                  <a:rPr lang="it-IT" dirty="0"/>
+                  <a:rPr lang="it-IT" sz="1600" dirty="0"/>
                   <a:t>), mostrando come la popolazione residente e il tasso di motorizzazione siano positivamente associati al numero di incidenti, mentre una maggiore estensione territoriale sia associata a una minore concentrazione degli stessi.</a:t>
                 </a:r>
               </a:p>
               <a:p>
                 <a:r>
-                  <a:rPr lang="it-IT" dirty="0"/>
+                  <a:rPr lang="it-IT" sz="1600" dirty="0"/>
                   <a:t>Le </a:t>
                 </a:r>
                 <a:r>
-                  <a:rPr lang="it-IT" u="sng" dirty="0"/>
+                  <a:rPr lang="it-IT" sz="1600" u="sng" dirty="0"/>
                   <a:t>analisi di clustering</a:t>
                 </a:r>
                 <a:r>
-                  <a:rPr lang="it-IT" dirty="0"/>
+                  <a:rPr lang="it-IT" sz="1600" dirty="0"/>
                   <a:t> hanno inoltre consentito di raggruppare i comuni in:</a:t>
                 </a:r>
               </a:p>
               <a:p>
                 <a:pPr lvl="1"/>
                 <a:r>
-                  <a:rPr lang="it-IT" b="1" dirty="0" err="1"/>
+                  <a:rPr lang="it-IT" sz="1600" b="1" dirty="0" err="1"/>
                   <a:t>avg_pop_density</a:t>
                 </a:r>
                 <a:r>
-                  <a:rPr lang="it-IT" b="1" dirty="0"/>
-                  <a:t>/avg_acc_per_</a:t>
+                  <a:rPr lang="it-IT" sz="1600" b="1" dirty="0"/>
+                  <a:t> - avg_acc_per_</a:t>
                 </a:r>
                 <a:r>
-                  <a:rPr lang="it-IT" b="1" i="1" dirty="0"/>
+                  <a:rPr lang="it-IT" sz="1600" b="1" i="1" dirty="0"/>
                   <a:t>km2</a:t>
                 </a:r>
                 <a:r>
-                  <a:rPr lang="it-IT" i="1" dirty="0"/>
+                  <a:rPr lang="it-IT" sz="1600" i="1" dirty="0"/>
                   <a:t>:</a:t>
                 </a:r>
                 <a:br>
-                  <a:rPr lang="it-IT" i="1" dirty="0"/>
+                  <a:rPr lang="it-IT" sz="1600" i="1" dirty="0"/>
                 </a:br>
                 <a:r>
-                  <a:rPr lang="it-IT" dirty="0"/>
+                  <a:rPr lang="it-IT" sz="1600" dirty="0"/>
                   <a:t>Classi caratterizzate da </a:t>
                 </a:r>
                 <a:r>
-                  <a:rPr lang="it-IT" b="1" dirty="0"/>
+                  <a:rPr lang="it-IT" sz="1600" b="1" dirty="0"/>
                   <a:t>differenti livelli di densità urbana e incidentalità</a:t>
                 </a:r>
                 <a:r>
-                  <a:rPr lang="it-IT" dirty="0"/>
+                  <a:rPr lang="it-IT" sz="1600" dirty="0"/>
                   <a:t>, distinguendo progressivamente </a:t>
                 </a:r>
                 <a:r>
-                  <a:rPr lang="it-IT" u="sng" dirty="0"/>
+                  <a:rPr lang="it-IT" sz="1600" u="sng" dirty="0"/>
                   <a:t>i piccoli comuni a bassa densità e bassa incidentalità</a:t>
                 </a:r>
                 <a:r>
-                  <a:rPr lang="it-IT" dirty="0"/>
+                  <a:rPr lang="it-IT" sz="1600" dirty="0"/>
                   <a:t> dai </a:t>
                 </a:r>
                 <a:r>
-                  <a:rPr lang="it-IT" u="sng" dirty="0"/>
+                  <a:rPr lang="it-IT" sz="1600" u="sng" dirty="0"/>
                   <a:t>comuni più urbanizzati e metropolitani</a:t>
                 </a:r>
                 <a:r>
-                  <a:rPr lang="it-IT" dirty="0"/>
+                  <a:rPr lang="it-IT" sz="1600" dirty="0"/>
                   <a:t>, caratterizzati da una maggiore densità abitativa e da un'elevata concentrazione di incidenti. Pur non evidenziando cluster perfettamente separati, questa analisi costituisce un utile supporto per la segmentazione del territorio e la definizione di strategie di intervento mirate.</a:t>
                 </a:r>
               </a:p>
               <a:p>
                 <a:pPr lvl="1"/>
                 <a:r>
-                  <a:rPr lang="it-IT" b="1" dirty="0"/>
-                  <a:t>avg_acc_per_1000/avg_acc_rate_vehicles</a:t>
+                  <a:rPr lang="it-IT" sz="1600" b="1" dirty="0"/>
+                  <a:t>avg_acc_per_1000 - </a:t>
                 </a:r>
                 <a:r>
-                  <a:rPr lang="it-IT" dirty="0"/>
+                  <a:rPr lang="it-IT" sz="1600" b="1" dirty="0" err="1"/>
+                  <a:t>avg_acc_rate_vehicles</a:t>
+                </a:r>
+                <a:r>
+                  <a:rPr lang="it-IT" sz="1600" dirty="0"/>
                   <a:t>:</a:t>
                 </a:r>
                 <a:br>
-                  <a:rPr lang="it-IT" b="1" dirty="0"/>
+                  <a:rPr lang="it-IT" sz="1600" b="1" dirty="0"/>
                 </a:br>
                 <a:r>
-                  <a:rPr lang="it-IT" dirty="0"/>
+                  <a:rPr lang="it-IT" sz="1600" dirty="0"/>
                   <a:t>Evidenzia come all'</a:t>
                 </a:r>
                 <a:r>
-                  <a:rPr lang="it-IT" u="sng" dirty="0"/>
+                  <a:rPr lang="it-IT" sz="1600" u="sng" dirty="0"/>
                   <a:t>aumentare dell'incidentalità rispetto alla popolazione</a:t>
                 </a:r>
                 <a:r>
-                  <a:rPr lang="it-IT" dirty="0"/>
+                  <a:rPr lang="it-IT" sz="1600" dirty="0"/>
                   <a:t> </a:t>
                 </a:r>
                 <a:r>
-                  <a:rPr lang="it-IT" u="sng" dirty="0"/>
+                  <a:rPr lang="it-IT" sz="1600" u="sng" dirty="0"/>
                   <a:t>aumenti anche quella rispetto al parco veicolare</a:t>
                 </a:r>
                 <a:r>
-                  <a:rPr lang="it-IT" dirty="0"/>
+                  <a:rPr lang="it-IT" sz="1600" dirty="0"/>
                   <a:t>, consentendo di distinguere cinque livelli progressivi di rischio tra i comuni analizzati. Tale classificazione permette di individuare i </a:t>
                 </a:r>
                 <a:r>
-                  <a:rPr lang="it-IT" u="sng" dirty="0"/>
+                  <a:rPr lang="it-IT" sz="1600" u="sng" dirty="0"/>
                   <a:t>territori maggiormente esposti al rischio</a:t>
                 </a:r>
                 <a:r>
-                  <a:rPr lang="it-IT" dirty="0"/>
+                  <a:rPr lang="it-IT" sz="1600" dirty="0"/>
                   <a:t> e rappresenta un utile supporto per la </a:t>
                 </a:r>
                 <a:r>
-                  <a:rPr lang="it-IT" b="1" dirty="0"/>
+                  <a:rPr lang="it-IT" sz="1600" b="1" dirty="0"/>
                   <a:t>pianificazione di interventi di sicurezza stradale</a:t>
                 </a:r>
                 <a:r>
-                  <a:rPr lang="it-IT" dirty="0"/>
+                  <a:rPr lang="it-IT" sz="1600" dirty="0"/>
                   <a:t>.</a:t>
                 </a:r>
               </a:p>
@@ -35245,12 +35111,12 @@
             <p:spPr>
               <a:xfrm>
                 <a:off x="548640" y="1412776"/>
-                <a:ext cx="11452016" cy="4927064"/>
+                <a:ext cx="11452016" cy="5445224"/>
               </a:xfrm>
               <a:blipFill>
                 <a:blip r:embed="rId4"/>
                 <a:stretch>
-                  <a:fillRect l="-266" t="-1361" b="-1238"/>
+                  <a:fillRect l="-213" t="-784" r="-585" b="-784"/>
                 </a:stretch>
               </a:blipFill>
             </p:spPr>
@@ -36077,20 +35943,20 @@
 </file>
 
 <file path=customXml/item1.xml><?xml version="1.0" encoding="utf-8"?>
+<p:properties xmlns:p="http://schemas.microsoft.com/office/2006/metadata/properties" xmlns:xsi="http://www.w3.org/2001/XMLSchema-instance" xmlns:pc="http://schemas.microsoft.com/office/infopath/2007/PartnerControls">
+  <documentManagement>
+    <MediaServiceKeyPoints xmlns="6c66ad41-3359-4f35-bfbc-f1c93290a393" xsi:nil="true"/>
+  </documentManagement>
+</p:properties>
+</file>
+
+<file path=customXml/item2.xml><?xml version="1.0" encoding="utf-8"?>
 <?mso-contentType ?>
 <FormTemplates xmlns="http://schemas.microsoft.com/sharepoint/v3/contenttype/forms">
   <Display>DocumentLibraryForm</Display>
   <Edit>DocumentLibraryForm</Edit>
   <New>DocumentLibraryForm</New>
 </FormTemplates>
-</file>
-
-<file path=customXml/item2.xml><?xml version="1.0" encoding="utf-8"?>
-<p:properties xmlns:p="http://schemas.microsoft.com/office/2006/metadata/properties" xmlns:xsi="http://www.w3.org/2001/XMLSchema-instance" xmlns:pc="http://schemas.microsoft.com/office/infopath/2007/PartnerControls">
-  <documentManagement>
-    <MediaServiceKeyPoints xmlns="6c66ad41-3359-4f35-bfbc-f1c93290a393" xsi:nil="true"/>
-  </documentManagement>
-</p:properties>
 </file>
 
 <file path=customXml/item3.xml><?xml version="1.0" encoding="utf-8"?>
@@ -36258,14 +36124,6 @@
 </file>
 
 <file path=customXml/itemProps1.xml><?xml version="1.0" encoding="utf-8"?>
-<ds:datastoreItem xmlns:ds="http://schemas.openxmlformats.org/officeDocument/2006/customXml" ds:itemID="{8106BD98-E608-40A1-98A8-93D5976215CA}">
-  <ds:schemaRefs>
-    <ds:schemaRef ds:uri="http://schemas.microsoft.com/sharepoint/v3/contenttype/forms"/>
-  </ds:schemaRefs>
-</ds:datastoreItem>
-</file>
-
-<file path=customXml/itemProps2.xml><?xml version="1.0" encoding="utf-8"?>
 <ds:datastoreItem xmlns:ds="http://schemas.openxmlformats.org/officeDocument/2006/customXml" ds:itemID="{6A86D9CC-0D9D-4BFE-B3F3-26F480BF8C8A}">
   <ds:schemaRefs>
     <ds:schemaRef ds:uri="6c66ad41-3359-4f35-bfbc-f1c93290a393"/>
@@ -36277,6 +36135,14 @@
     <ds:schemaRef ds:uri="http://purl.org/dc/terms/"/>
     <ds:schemaRef ds:uri="http://schemas.openxmlformats.org/package/2006/metadata/core-properties"/>
     <ds:schemaRef ds:uri="http://www.w3.org/XML/1998/namespace"/>
+  </ds:schemaRefs>
+</ds:datastoreItem>
+</file>
+
+<file path=customXml/itemProps2.xml><?xml version="1.0" encoding="utf-8"?>
+<ds:datastoreItem xmlns:ds="http://schemas.openxmlformats.org/officeDocument/2006/customXml" ds:itemID="{8106BD98-E608-40A1-98A8-93D5976215CA}">
+  <ds:schemaRefs>
+    <ds:schemaRef ds:uri="http://schemas.microsoft.com/sharepoint/v3/contenttype/forms"/>
   </ds:schemaRefs>
 </ds:datastoreItem>
 </file>

--- a/final_project_boolean.pptx
+++ b/final_project_boolean.pptx
@@ -227,7 +227,7 @@
               <a:rPr lang="it-IT" smtClean="0">
                 <a:latin typeface="Tw Cen MT" panose="020B0602020104020603" pitchFamily="34" charset="0"/>
               </a:rPr>
-              <a:t>02/08/2026</a:t>
+              <a:t>06/08/2026</a:t>
             </a:fld>
             <a:endParaRPr lang="it-IT">
               <a:latin typeface="Tw Cen MT" panose="020B0602020104020603" pitchFamily="34" charset="0"/>
@@ -421,7 +421,7 @@
             <a:pPr rtl="0"/>
             <a:fld id="{A8179E5A-E0EC-4D14-85DA-2BF1DBD2D7AB}" type="datetime1">
               <a:rPr lang="it-IT" noProof="0" smtClean="0"/>
-              <a:t>02/08/2026</a:t>
+              <a:t>06/08/2026</a:t>
             </a:fld>
             <a:endParaRPr lang="it-IT" noProof="0"/>
           </a:p>
@@ -31230,8 +31230,8 @@
           </a:p>
         </p:txBody>
       </p:sp>
-      <mc:AlternateContent xmlns:mc="http://schemas.openxmlformats.org/markup-compatibility/2006">
-        <mc:Choice xmlns:a14="http://schemas.microsoft.com/office/drawing/2010/main" Requires="a14">
+      <mc:AlternateContent xmlns:mc="http://schemas.openxmlformats.org/markup-compatibility/2006" xmlns:a14="http://schemas.microsoft.com/office/drawing/2010/main">
+        <mc:Choice Requires="a14">
           <p:sp>
             <p:nvSpPr>
               <p:cNvPr id="13" name="Segnaposto contenuto 12">
@@ -31518,7 +31518,7 @@
             </p:txBody>
           </p:sp>
         </mc:Choice>
-        <mc:Fallback>
+        <mc:Fallback xmlns="">
           <p:sp>
             <p:nvSpPr>
               <p:cNvPr id="13" name="Segnaposto contenuto 12">
@@ -32735,8 +32735,8 @@
           </a:p>
         </p:txBody>
       </p:sp>
-      <mc:AlternateContent xmlns:mc="http://schemas.openxmlformats.org/markup-compatibility/2006">
-        <mc:Choice xmlns:a14="http://schemas.microsoft.com/office/drawing/2010/main" Requires="a14">
+      <mc:AlternateContent xmlns:mc="http://schemas.openxmlformats.org/markup-compatibility/2006" xmlns:a14="http://schemas.microsoft.com/office/drawing/2010/main">
+        <mc:Choice Requires="a14">
           <p:sp>
             <p:nvSpPr>
               <p:cNvPr id="4" name="CasellaDiTesto 3">
@@ -33035,7 +33035,7 @@
                 </a:r>
                 <a:r>
                   <a:rPr lang="it-IT" sz="2000" dirty="0"/>
-                  <a:t>il passaggio da un anno al successivo è associato a una diminuzione media di </a:t>
+                  <a:t>il passaggio da un anno al successivo è associato ad un aumento medio di </a:t>
                 </a:r>
                 <a:r>
                   <a:rPr lang="it-IT" sz="2000" b="1" dirty="0"/>
@@ -33049,7 +33049,7 @@
             </p:txBody>
           </p:sp>
         </mc:Choice>
-        <mc:Fallback>
+        <mc:Fallback xmlns="">
           <p:sp>
             <p:nvSpPr>
               <p:cNvPr id="4" name="CasellaDiTesto 3">
@@ -33522,8 +33522,8 @@
           </a:graphicData>
         </a:graphic>
       </p:graphicFrame>
-      <mc:AlternateContent xmlns:mc="http://schemas.openxmlformats.org/markup-compatibility/2006">
-        <mc:Choice xmlns:a14="http://schemas.microsoft.com/office/drawing/2010/main" Requires="a14">
+      <mc:AlternateContent xmlns:mc="http://schemas.openxmlformats.org/markup-compatibility/2006" xmlns:a14="http://schemas.microsoft.com/office/drawing/2010/main">
+        <mc:Choice Requires="a14">
           <p:sp>
             <p:nvSpPr>
               <p:cNvPr id="2" name="CasellaDiTesto 1">
@@ -33709,7 +33709,7 @@
             </p:txBody>
           </p:sp>
         </mc:Choice>
-        <mc:Fallback>
+        <mc:Fallback xmlns="">
           <p:sp>
             <p:nvSpPr>
               <p:cNvPr id="2" name="CasellaDiTesto 1">
@@ -33754,8 +33754,8 @@
           </p:sp>
         </mc:Fallback>
       </mc:AlternateContent>
-      <mc:AlternateContent xmlns:mc="http://schemas.openxmlformats.org/markup-compatibility/2006">
-        <mc:Choice xmlns:a14="http://schemas.microsoft.com/office/drawing/2010/main" Requires="a14">
+      <mc:AlternateContent xmlns:mc="http://schemas.openxmlformats.org/markup-compatibility/2006" xmlns:a14="http://schemas.microsoft.com/office/drawing/2010/main">
+        <mc:Choice Requires="a14">
           <p:sp>
             <p:nvSpPr>
               <p:cNvPr id="7" name="CasellaDiTesto 6">
@@ -33803,7 +33803,7 @@
             </p:txBody>
           </p:sp>
         </mc:Choice>
-        <mc:Fallback>
+        <mc:Fallback xmlns="">
           <p:sp>
             <p:nvSpPr>
               <p:cNvPr id="7" name="CasellaDiTesto 6">
@@ -34044,10 +34044,10 @@
       </p:pic>
       <p:pic>
         <p:nvPicPr>
-          <p:cNvPr id="8" name="Immagine 7">
-            <a:extLst>
-              <a:ext uri="{FF2B5EF4-FFF2-40B4-BE49-F238E27FC236}">
-                <a16:creationId xmlns:a16="http://schemas.microsoft.com/office/drawing/2014/main" id="{674BA60E-0A20-00C3-DE28-023D54D4FC66}"/>
+          <p:cNvPr id="13" name="Immagine 12" descr="Immagine che contiene testo, Carattere, numero, linea&#10;&#10;Il contenuto generato dall'IA potrebbe non essere corretto.">
+            <a:extLst>
+              <a:ext uri="{FF2B5EF4-FFF2-40B4-BE49-F238E27FC236}">
+                <a16:creationId xmlns:a16="http://schemas.microsoft.com/office/drawing/2014/main" id="{E057E5B1-C9F0-CAA2-86A6-8F41FFAE9167}"/>
               </a:ext>
             </a:extLst>
           </p:cNvPr>
@@ -34064,8 +34064,8 @@
         </p:blipFill>
         <p:spPr>
           <a:xfrm>
-            <a:off x="548641" y="3426974"/>
-            <a:ext cx="11380007" cy="1656184"/>
+            <a:off x="548640" y="5373216"/>
+            <a:ext cx="11380007" cy="1168460"/>
           </a:xfrm>
           <a:prstGeom prst="rect">
             <a:avLst/>
@@ -34074,10 +34074,10 @@
       </p:pic>
       <p:pic>
         <p:nvPicPr>
-          <p:cNvPr id="13" name="Immagine 12" descr="Immagine che contiene testo, Carattere, numero, linea&#10;&#10;Il contenuto generato dall'IA potrebbe non essere corretto.">
-            <a:extLst>
-              <a:ext uri="{FF2B5EF4-FFF2-40B4-BE49-F238E27FC236}">
-                <a16:creationId xmlns:a16="http://schemas.microsoft.com/office/drawing/2014/main" id="{E057E5B1-C9F0-CAA2-86A6-8F41FFAE9167}"/>
+          <p:cNvPr id="16" name="Immagine 15" descr="Immagine che contiene testo, numero, Carattere, linea&#10;&#10;Il contenuto generato dall'IA potrebbe non essere corretto.">
+            <a:extLst>
+              <a:ext uri="{FF2B5EF4-FFF2-40B4-BE49-F238E27FC236}">
+                <a16:creationId xmlns:a16="http://schemas.microsoft.com/office/drawing/2014/main" id="{70157FA6-920E-4F46-FAAA-1512EA27C1D3}"/>
               </a:ext>
             </a:extLst>
           </p:cNvPr>
@@ -34088,36 +34088,6 @@
         </p:nvPicPr>
         <p:blipFill>
           <a:blip r:embed="rId5"/>
-          <a:stretch>
-            <a:fillRect/>
-          </a:stretch>
-        </p:blipFill>
-        <p:spPr>
-          <a:xfrm>
-            <a:off x="548640" y="5373216"/>
-            <a:ext cx="11380007" cy="1168460"/>
-          </a:xfrm>
-          <a:prstGeom prst="rect">
-            <a:avLst/>
-          </a:prstGeom>
-        </p:spPr>
-      </p:pic>
-      <p:pic>
-        <p:nvPicPr>
-          <p:cNvPr id="16" name="Immagine 15" descr="Immagine che contiene testo, numero, Carattere, linea&#10;&#10;Il contenuto generato dall'IA potrebbe non essere corretto.">
-            <a:extLst>
-              <a:ext uri="{FF2B5EF4-FFF2-40B4-BE49-F238E27FC236}">
-                <a16:creationId xmlns:a16="http://schemas.microsoft.com/office/drawing/2014/main" id="{70157FA6-920E-4F46-FAAA-1512EA27C1D3}"/>
-              </a:ext>
-            </a:extLst>
-          </p:cNvPr>
-          <p:cNvPicPr>
-            <a:picLocks noChangeAspect="1"/>
-          </p:cNvPicPr>
-          <p:nvPr/>
-        </p:nvPicPr>
-        <p:blipFill>
-          <a:blip r:embed="rId6"/>
           <a:stretch>
             <a:fillRect/>
           </a:stretch>
@@ -34184,10 +34154,10 @@
       </p:sp>
       <p:sp>
         <p:nvSpPr>
-          <p:cNvPr id="5" name="Rettangolo 4">
-            <a:extLst>
-              <a:ext uri="{FF2B5EF4-FFF2-40B4-BE49-F238E27FC236}">
-                <a16:creationId xmlns:a16="http://schemas.microsoft.com/office/drawing/2014/main" id="{A419D4CF-B068-2E55-57FC-02FBA65FB728}"/>
+          <p:cNvPr id="6" name="Rettangolo 5">
+            <a:extLst>
+              <a:ext uri="{FF2B5EF4-FFF2-40B4-BE49-F238E27FC236}">
+                <a16:creationId xmlns:a16="http://schemas.microsoft.com/office/drawing/2014/main" id="{4FD322E6-55B4-CE83-AF2B-28A98EC7DA08}"/>
               </a:ext>
             </a:extLst>
           </p:cNvPr>
@@ -34196,8 +34166,8 @@
         </p:nvSpPr>
         <p:spPr>
           <a:xfrm>
-            <a:off x="5994628" y="3407232"/>
-            <a:ext cx="1109484" cy="1656184"/>
+            <a:off x="6348028" y="5373216"/>
+            <a:ext cx="3564396" cy="1168460"/>
           </a:xfrm>
           <a:prstGeom prst="rect">
             <a:avLst/>
@@ -34232,12 +34202,42 @@
           </a:p>
         </p:txBody>
       </p:sp>
-      <p:sp>
-        <p:nvSpPr>
-          <p:cNvPr id="6" name="Rettangolo 5">
-            <a:extLst>
-              <a:ext uri="{FF2B5EF4-FFF2-40B4-BE49-F238E27FC236}">
-                <a16:creationId xmlns:a16="http://schemas.microsoft.com/office/drawing/2014/main" id="{4FD322E6-55B4-CE83-AF2B-28A98EC7DA08}"/>
+      <p:pic>
+        <p:nvPicPr>
+          <p:cNvPr id="3" name="Immagine 2" descr="Immagine che contiene testo, numero, Carattere, linea&#10;&#10;Il contenuto generato dall'IA potrebbe non essere corretto.">
+            <a:extLst>
+              <a:ext uri="{FF2B5EF4-FFF2-40B4-BE49-F238E27FC236}">
+                <a16:creationId xmlns:a16="http://schemas.microsoft.com/office/drawing/2014/main" id="{4B6EB369-9E3A-5545-0319-1955FDE9C5CB}"/>
+              </a:ext>
+            </a:extLst>
+          </p:cNvPr>
+          <p:cNvPicPr>
+            <a:picLocks noChangeAspect="1"/>
+          </p:cNvPicPr>
+          <p:nvPr/>
+        </p:nvPicPr>
+        <p:blipFill>
+          <a:blip r:embed="rId6"/>
+          <a:stretch>
+            <a:fillRect/>
+          </a:stretch>
+        </p:blipFill>
+        <p:spPr>
+          <a:xfrm>
+            <a:off x="548640" y="3342913"/>
+            <a:ext cx="11380006" cy="1803493"/>
+          </a:xfrm>
+          <a:prstGeom prst="rect">
+            <a:avLst/>
+          </a:prstGeom>
+        </p:spPr>
+      </p:pic>
+      <p:sp>
+        <p:nvSpPr>
+          <p:cNvPr id="7" name="Rettangolo 6">
+            <a:extLst>
+              <a:ext uri="{FF2B5EF4-FFF2-40B4-BE49-F238E27FC236}">
+                <a16:creationId xmlns:a16="http://schemas.microsoft.com/office/drawing/2014/main" id="{48AA1238-4051-0034-56B4-54D15118C80B}"/>
               </a:ext>
             </a:extLst>
           </p:cNvPr>
@@ -34246,8 +34246,8 @@
         </p:nvSpPr>
         <p:spPr>
           <a:xfrm>
-            <a:off x="6348028" y="5373216"/>
-            <a:ext cx="3564396" cy="1168460"/>
+            <a:off x="6129996" y="3342913"/>
+            <a:ext cx="1008112" cy="1803492"/>
           </a:xfrm>
           <a:prstGeom prst="rect">
             <a:avLst/>
@@ -34689,8 +34689,8 @@
           </a:xfrm>
         </p:spPr>
       </p:pic>
-      <mc:AlternateContent xmlns:mc="http://schemas.openxmlformats.org/markup-compatibility/2006">
-        <mc:Choice xmlns:a14="http://schemas.microsoft.com/office/drawing/2010/main" Requires="a14">
+      <mc:AlternateContent xmlns:mc="http://schemas.openxmlformats.org/markup-compatibility/2006" xmlns:a14="http://schemas.microsoft.com/office/drawing/2010/main">
+        <mc:Choice Requires="a14">
           <p:sp>
             <p:nvSpPr>
               <p:cNvPr id="2" name="Segnaposto contenuto 12">
@@ -35091,7 +35091,7 @@
             </p:txBody>
           </p:sp>
         </mc:Choice>
-        <mc:Fallback>
+        <mc:Fallback xmlns="">
           <p:sp>
             <p:nvSpPr>
               <p:cNvPr id="2" name="Segnaposto contenuto 12">
